--- a/仕様書/Enemy.pptx
+++ b/仕様書/Enemy.pptx
@@ -7,7 +7,8 @@
   <p:sldIdLst>
     <p:sldId id="256" r:id="rId2"/>
     <p:sldId id="258" r:id="rId3"/>
-    <p:sldId id="257" r:id="rId4"/>
+    <p:sldId id="259" r:id="rId4"/>
+    <p:sldId id="257" r:id="rId5"/>
   </p:sldIdLst>
   <p:sldSz cx="12192000" cy="6858000"/>
   <p:notesSz cx="6858000" cy="9144000"/>
@@ -106,6 +107,11 @@
       </a:defRPr>
     </a:lvl9pPr>
   </p:defaultTextStyle>
+  <p:extLst>
+    <p:ext uri="{EFAFB233-063F-42B5-8137-9DF3F51BA10A}">
+      <p15:sldGuideLst xmlns:p15="http://schemas.microsoft.com/office/powerpoint/2012/main"/>
+    </p:ext>
+  </p:extLst>
 </p:presentation>
 </file>
 
@@ -256,7 +262,7 @@
           <a:p>
             <a:fld id="{C7C71A78-F6D6-49BC-8378-A440D1241C02}" type="datetimeFigureOut">
               <a:rPr kumimoji="1" lang="ja-JP" altLang="en-US" smtClean="0"/>
-              <a:t>2026/6/2</a:t>
+              <a:t>2026/6/3</a:t>
             </a:fld>
             <a:endParaRPr kumimoji="1" lang="ja-JP" altLang="en-US"/>
           </a:p>
@@ -486,7 +492,7 @@
           <a:p>
             <a:fld id="{C7C71A78-F6D6-49BC-8378-A440D1241C02}" type="datetimeFigureOut">
               <a:rPr kumimoji="1" lang="ja-JP" altLang="en-US" smtClean="0"/>
-              <a:t>2026/6/2</a:t>
+              <a:t>2026/6/3</a:t>
             </a:fld>
             <a:endParaRPr kumimoji="1" lang="ja-JP" altLang="en-US"/>
           </a:p>
@@ -726,7 +732,7 @@
           <a:p>
             <a:fld id="{C7C71A78-F6D6-49BC-8378-A440D1241C02}" type="datetimeFigureOut">
               <a:rPr kumimoji="1" lang="ja-JP" altLang="en-US" smtClean="0"/>
-              <a:t>2026/6/2</a:t>
+              <a:t>2026/6/3</a:t>
             </a:fld>
             <a:endParaRPr kumimoji="1" lang="ja-JP" altLang="en-US"/>
           </a:p>
@@ -956,7 +962,7 @@
           <a:p>
             <a:fld id="{C7C71A78-F6D6-49BC-8378-A440D1241C02}" type="datetimeFigureOut">
               <a:rPr kumimoji="1" lang="ja-JP" altLang="en-US" smtClean="0"/>
-              <a:t>2026/6/2</a:t>
+              <a:t>2026/6/3</a:t>
             </a:fld>
             <a:endParaRPr kumimoji="1" lang="ja-JP" altLang="en-US"/>
           </a:p>
@@ -1231,7 +1237,7 @@
           <a:p>
             <a:fld id="{C7C71A78-F6D6-49BC-8378-A440D1241C02}" type="datetimeFigureOut">
               <a:rPr kumimoji="1" lang="ja-JP" altLang="en-US" smtClean="0"/>
-              <a:t>2026/6/2</a:t>
+              <a:t>2026/6/3</a:t>
             </a:fld>
             <a:endParaRPr kumimoji="1" lang="ja-JP" altLang="en-US"/>
           </a:p>
@@ -1560,7 +1566,7 @@
           <a:p>
             <a:fld id="{C7C71A78-F6D6-49BC-8378-A440D1241C02}" type="datetimeFigureOut">
               <a:rPr kumimoji="1" lang="ja-JP" altLang="en-US" smtClean="0"/>
-              <a:t>2026/6/2</a:t>
+              <a:t>2026/6/3</a:t>
             </a:fld>
             <a:endParaRPr kumimoji="1" lang="ja-JP" altLang="en-US"/>
           </a:p>
@@ -2036,7 +2042,7 @@
           <a:p>
             <a:fld id="{C7C71A78-F6D6-49BC-8378-A440D1241C02}" type="datetimeFigureOut">
               <a:rPr kumimoji="1" lang="ja-JP" altLang="en-US" smtClean="0"/>
-              <a:t>2026/6/2</a:t>
+              <a:t>2026/6/3</a:t>
             </a:fld>
             <a:endParaRPr kumimoji="1" lang="ja-JP" altLang="en-US"/>
           </a:p>
@@ -2177,7 +2183,7 @@
           <a:p>
             <a:fld id="{C7C71A78-F6D6-49BC-8378-A440D1241C02}" type="datetimeFigureOut">
               <a:rPr kumimoji="1" lang="ja-JP" altLang="en-US" smtClean="0"/>
-              <a:t>2026/6/2</a:t>
+              <a:t>2026/6/3</a:t>
             </a:fld>
             <a:endParaRPr kumimoji="1" lang="ja-JP" altLang="en-US"/>
           </a:p>
@@ -2290,7 +2296,7 @@
           <a:p>
             <a:fld id="{C7C71A78-F6D6-49BC-8378-A440D1241C02}" type="datetimeFigureOut">
               <a:rPr kumimoji="1" lang="ja-JP" altLang="en-US" smtClean="0"/>
-              <a:t>2026/6/2</a:t>
+              <a:t>2026/6/3</a:t>
             </a:fld>
             <a:endParaRPr kumimoji="1" lang="ja-JP" altLang="en-US"/>
           </a:p>
@@ -2633,7 +2639,7 @@
           <a:p>
             <a:fld id="{C7C71A78-F6D6-49BC-8378-A440D1241C02}" type="datetimeFigureOut">
               <a:rPr kumimoji="1" lang="ja-JP" altLang="en-US" smtClean="0"/>
-              <a:t>2026/6/2</a:t>
+              <a:t>2026/6/3</a:t>
             </a:fld>
             <a:endParaRPr kumimoji="1" lang="ja-JP" altLang="en-US"/>
           </a:p>
@@ -2921,7 +2927,7 @@
           <a:p>
             <a:fld id="{C7C71A78-F6D6-49BC-8378-A440D1241C02}" type="datetimeFigureOut">
               <a:rPr kumimoji="1" lang="ja-JP" altLang="en-US" smtClean="0"/>
-              <a:t>2026/6/2</a:t>
+              <a:t>2026/6/3</a:t>
             </a:fld>
             <a:endParaRPr kumimoji="1" lang="ja-JP" altLang="en-US"/>
           </a:p>
@@ -3194,7 +3200,7 @@
           <a:p>
             <a:fld id="{C7C71A78-F6D6-49BC-8378-A440D1241C02}" type="datetimeFigureOut">
               <a:rPr kumimoji="1" lang="ja-JP" altLang="en-US" smtClean="0"/>
-              <a:t>2026/6/2</a:t>
+              <a:t>2026/6/3</a:t>
             </a:fld>
             <a:endParaRPr kumimoji="1" lang="ja-JP" altLang="en-US"/>
           </a:p>
@@ -3665,12 +3671,150 @@
           </a:p>
         </p:txBody>
       </p:sp>
+      <p:sp>
+        <p:nvSpPr>
+          <p:cNvPr id="6" name="テキスト ボックス 5">
+            <a:extLst>
+              <a:ext uri="{FF2B5EF4-FFF2-40B4-BE49-F238E27FC236}">
+                <a16:creationId xmlns:a16="http://schemas.microsoft.com/office/drawing/2014/main" id="{CA7174EB-295D-4EC6-83CC-3E6EC798CD12}"/>
+              </a:ext>
+            </a:extLst>
+          </p:cNvPr>
+          <p:cNvSpPr txBox="1"/>
+          <p:nvPr/>
+        </p:nvSpPr>
+        <p:spPr>
+          <a:xfrm>
+            <a:off x="2471737" y="672510"/>
+            <a:ext cx="1877437" cy="769441"/>
+          </a:xfrm>
+          <a:prstGeom prst="rect">
+            <a:avLst/>
+          </a:prstGeom>
+          <a:noFill/>
+        </p:spPr>
+        <p:txBody>
+          <a:bodyPr wrap="none" rtlCol="0">
+            <a:spAutoFit/>
+          </a:bodyPr>
+          <a:lstStyle/>
+          <a:p>
+            <a:r>
+              <a:rPr kumimoji="1" lang="ja-JP" altLang="en-US" sz="4400" dirty="0"/>
+              <a:t>一般敵</a:t>
+            </a:r>
+          </a:p>
+        </p:txBody>
+      </p:sp>
+      <p:sp>
+        <p:nvSpPr>
+          <p:cNvPr id="7" name="テキスト ボックス 6">
+            <a:extLst>
+              <a:ext uri="{FF2B5EF4-FFF2-40B4-BE49-F238E27FC236}">
+                <a16:creationId xmlns:a16="http://schemas.microsoft.com/office/drawing/2014/main" id="{258E5F64-3ACA-4312-A336-1321E3017DE4}"/>
+              </a:ext>
+            </a:extLst>
+          </p:cNvPr>
+          <p:cNvSpPr txBox="1"/>
+          <p:nvPr/>
+        </p:nvSpPr>
+        <p:spPr>
+          <a:xfrm>
+            <a:off x="514350" y="2300288"/>
+            <a:ext cx="2236510" cy="707886"/>
+          </a:xfrm>
+          <a:prstGeom prst="rect">
+            <a:avLst/>
+          </a:prstGeom>
+          <a:noFill/>
+        </p:spPr>
+        <p:txBody>
+          <a:bodyPr wrap="none" rtlCol="0">
+            <a:spAutoFit/>
+          </a:bodyPr>
+          <a:lstStyle/>
+          <a:p>
+            <a:r>
+              <a:rPr lang="ja-JP" altLang="en-US" sz="4000" dirty="0"/>
+              <a:t>ー仕様ー</a:t>
+            </a:r>
+            <a:endParaRPr kumimoji="1" lang="ja-JP" altLang="en-US" sz="4000" dirty="0"/>
+          </a:p>
+        </p:txBody>
+      </p:sp>
+      <p:sp>
+        <p:nvSpPr>
+          <p:cNvPr id="8" name="テキスト ボックス 7">
+            <a:extLst>
+              <a:ext uri="{FF2B5EF4-FFF2-40B4-BE49-F238E27FC236}">
+                <a16:creationId xmlns:a16="http://schemas.microsoft.com/office/drawing/2014/main" id="{77B56265-8323-405F-880E-09C8005DC612}"/>
+              </a:ext>
+            </a:extLst>
+          </p:cNvPr>
+          <p:cNvSpPr txBox="1"/>
+          <p:nvPr/>
+        </p:nvSpPr>
+        <p:spPr>
+          <a:xfrm>
+            <a:off x="514350" y="3004455"/>
+            <a:ext cx="10597773" cy="646331"/>
+          </a:xfrm>
+          <a:prstGeom prst="rect">
+            <a:avLst/>
+          </a:prstGeom>
+          <a:noFill/>
+        </p:spPr>
+        <p:txBody>
+          <a:bodyPr wrap="none" rtlCol="0">
+            <a:spAutoFit/>
+          </a:bodyPr>
+          <a:lstStyle/>
+          <a:p>
+            <a:r>
+              <a:rPr kumimoji="1" lang="ja-JP" altLang="en-US" dirty="0"/>
+              <a:t>視界に入ると</a:t>
+            </a:r>
+            <a:r>
+              <a:rPr kumimoji="1" lang="en-US" altLang="ja-JP" dirty="0"/>
+              <a:t>2</a:t>
+            </a:r>
+            <a:r>
+              <a:rPr kumimoji="1" lang="ja-JP" altLang="en-US" dirty="0"/>
+              <a:t>秒間プレイヤーに向けて追尾し、打つ位置が決まると</a:t>
+            </a:r>
+            <a:r>
+              <a:rPr kumimoji="1" lang="en-US" altLang="ja-JP" dirty="0"/>
+              <a:t>3</a:t>
+            </a:r>
+            <a:r>
+              <a:rPr kumimoji="1" lang="ja-JP" altLang="en-US" dirty="0"/>
+              <a:t>秒時点で一直線にビームを打つ</a:t>
+            </a:r>
+            <a:endParaRPr kumimoji="1" lang="en-US" altLang="ja-JP" dirty="0"/>
+          </a:p>
+          <a:p>
+            <a:r>
+              <a:rPr lang="ja-JP" altLang="en-US" dirty="0"/>
+              <a:t>狙っている途中で</a:t>
+            </a:r>
+            <a:r>
+              <a:rPr lang="en-US" altLang="ja-JP" dirty="0"/>
+              <a:t>Player</a:t>
+            </a:r>
+            <a:r>
+              <a:rPr lang="ja-JP" altLang="en-US" dirty="0"/>
+              <a:t>が壁などの死角に入ると追尾をやめる</a:t>
+            </a:r>
+            <a:endParaRPr kumimoji="1" lang="ja-JP" altLang="en-US" dirty="0"/>
+          </a:p>
+        </p:txBody>
+      </p:sp>
       <p:pic>
         <p:nvPicPr>
-          <p:cNvPr id="5" name="図 4">
-            <a:extLst>
-              <a:ext uri="{FF2B5EF4-FFF2-40B4-BE49-F238E27FC236}">
-                <a16:creationId xmlns:a16="http://schemas.microsoft.com/office/drawing/2014/main" id="{1BC57774-0185-4F7E-BC35-06C987F2D319}"/>
+          <p:cNvPr id="13" name="図 12">
+            <a:extLst>
+              <a:ext uri="{FF2B5EF4-FFF2-40B4-BE49-F238E27FC236}">
+                <a16:creationId xmlns:a16="http://schemas.microsoft.com/office/drawing/2014/main" id="{3E32A82A-7CE9-4068-A8E8-914230549AF7}"/>
               </a:ext>
             </a:extLst>
           </p:cNvPr>
@@ -3693,163 +3837,20 @@
         </p:blipFill>
         <p:spPr>
           <a:xfrm>
-            <a:off x="-861120" y="-657225"/>
-            <a:ext cx="3704333" cy="2789145"/>
+            <a:off x="1797757" y="5697819"/>
+            <a:ext cx="1230957" cy="1088296"/>
           </a:xfrm>
           <a:prstGeom prst="rect">
             <a:avLst/>
           </a:prstGeom>
         </p:spPr>
       </p:pic>
-      <p:sp>
-        <p:nvSpPr>
-          <p:cNvPr id="6" name="テキスト ボックス 5">
-            <a:extLst>
-              <a:ext uri="{FF2B5EF4-FFF2-40B4-BE49-F238E27FC236}">
-                <a16:creationId xmlns:a16="http://schemas.microsoft.com/office/drawing/2014/main" id="{CA7174EB-295D-4EC6-83CC-3E6EC798CD12}"/>
-              </a:ext>
-            </a:extLst>
-          </p:cNvPr>
-          <p:cNvSpPr txBox="1"/>
-          <p:nvPr/>
-        </p:nvSpPr>
-        <p:spPr>
-          <a:xfrm>
-            <a:off x="2471737" y="672510"/>
-            <a:ext cx="3066865" cy="769441"/>
-          </a:xfrm>
-          <a:prstGeom prst="rect">
-            <a:avLst/>
-          </a:prstGeom>
-          <a:noFill/>
-        </p:spPr>
-        <p:txBody>
-          <a:bodyPr wrap="none" rtlCol="0">
-            <a:spAutoFit/>
-          </a:bodyPr>
-          <a:lstStyle/>
-          <a:p>
-            <a:r>
-              <a:rPr kumimoji="1" lang="ja-JP" altLang="en-US" sz="4400" dirty="0"/>
-              <a:t>一般</a:t>
-            </a:r>
-            <a:r>
-              <a:rPr kumimoji="1" lang="en-US" altLang="ja-JP" sz="4400" dirty="0"/>
-              <a:t>Enemy</a:t>
-            </a:r>
-            <a:endParaRPr kumimoji="1" lang="ja-JP" altLang="en-US" sz="4400" dirty="0"/>
-          </a:p>
-        </p:txBody>
-      </p:sp>
-      <p:sp>
-        <p:nvSpPr>
-          <p:cNvPr id="7" name="テキスト ボックス 6">
-            <a:extLst>
-              <a:ext uri="{FF2B5EF4-FFF2-40B4-BE49-F238E27FC236}">
-                <a16:creationId xmlns:a16="http://schemas.microsoft.com/office/drawing/2014/main" id="{258E5F64-3ACA-4312-A336-1321E3017DE4}"/>
-              </a:ext>
-            </a:extLst>
-          </p:cNvPr>
-          <p:cNvSpPr txBox="1"/>
-          <p:nvPr/>
-        </p:nvSpPr>
-        <p:spPr>
-          <a:xfrm>
-            <a:off x="514350" y="2300288"/>
-            <a:ext cx="2236510" cy="707886"/>
-          </a:xfrm>
-          <a:prstGeom prst="rect">
-            <a:avLst/>
-          </a:prstGeom>
-          <a:noFill/>
-        </p:spPr>
-        <p:txBody>
-          <a:bodyPr wrap="none" rtlCol="0">
-            <a:spAutoFit/>
-          </a:bodyPr>
-          <a:lstStyle/>
-          <a:p>
-            <a:r>
-              <a:rPr lang="ja-JP" altLang="en-US" sz="4000" dirty="0"/>
-              <a:t>ー仕様ー</a:t>
-            </a:r>
-            <a:endParaRPr kumimoji="1" lang="ja-JP" altLang="en-US" sz="4000" dirty="0"/>
-          </a:p>
-        </p:txBody>
-      </p:sp>
-      <p:sp>
-        <p:nvSpPr>
-          <p:cNvPr id="8" name="テキスト ボックス 7">
-            <a:extLst>
-              <a:ext uri="{FF2B5EF4-FFF2-40B4-BE49-F238E27FC236}">
-                <a16:creationId xmlns:a16="http://schemas.microsoft.com/office/drawing/2014/main" id="{77B56265-8323-405F-880E-09C8005DC612}"/>
-              </a:ext>
-            </a:extLst>
-          </p:cNvPr>
-          <p:cNvSpPr txBox="1"/>
-          <p:nvPr/>
-        </p:nvSpPr>
-        <p:spPr>
-          <a:xfrm>
-            <a:off x="514350" y="3004455"/>
-            <a:ext cx="10597773" cy="646331"/>
-          </a:xfrm>
-          <a:prstGeom prst="rect">
-            <a:avLst/>
-          </a:prstGeom>
-          <a:noFill/>
-        </p:spPr>
-        <p:txBody>
-          <a:bodyPr wrap="none" rtlCol="0">
-            <a:spAutoFit/>
-          </a:bodyPr>
-          <a:lstStyle/>
-          <a:p>
-            <a:r>
-              <a:rPr kumimoji="1" lang="ja-JP" altLang="en-US" dirty="0"/>
-              <a:t>視界に入ると</a:t>
-            </a:r>
-            <a:r>
-              <a:rPr kumimoji="1" lang="en-US" altLang="ja-JP" dirty="0"/>
-              <a:t>2</a:t>
-            </a:r>
-            <a:r>
-              <a:rPr kumimoji="1" lang="ja-JP" altLang="en-US" dirty="0"/>
-              <a:t>秒間プレイヤーに向けて追尾し、打つ位置が決まると</a:t>
-            </a:r>
-            <a:r>
-              <a:rPr kumimoji="1" lang="en-US" altLang="ja-JP" dirty="0"/>
-              <a:t>3</a:t>
-            </a:r>
-            <a:r>
-              <a:rPr kumimoji="1" lang="ja-JP" altLang="en-US" dirty="0"/>
-              <a:t>秒時点で一直線にビームを打つ</a:t>
-            </a:r>
-            <a:endParaRPr kumimoji="1" lang="en-US" altLang="ja-JP" dirty="0"/>
-          </a:p>
-          <a:p>
-            <a:r>
-              <a:rPr lang="ja-JP" altLang="en-US" dirty="0"/>
-              <a:t>狙っている途中で</a:t>
-            </a:r>
-            <a:r>
-              <a:rPr lang="en-US" altLang="ja-JP" dirty="0"/>
-              <a:t>Player</a:t>
-            </a:r>
-            <a:r>
-              <a:rPr lang="ja-JP" altLang="en-US" dirty="0"/>
-              <a:t>が壁などの死角に入ると追尾をやめる</a:t>
-            </a:r>
-            <a:endParaRPr kumimoji="1" lang="ja-JP" altLang="en-US" dirty="0"/>
-          </a:p>
-        </p:txBody>
-      </p:sp>
       <p:pic>
         <p:nvPicPr>
-          <p:cNvPr id="13" name="図 12">
-            <a:extLst>
-              <a:ext uri="{FF2B5EF4-FFF2-40B4-BE49-F238E27FC236}">
-                <a16:creationId xmlns:a16="http://schemas.microsoft.com/office/drawing/2014/main" id="{3E32A82A-7CE9-4068-A8E8-914230549AF7}"/>
+          <p:cNvPr id="16" name="図 15">
+            <a:extLst>
+              <a:ext uri="{FF2B5EF4-FFF2-40B4-BE49-F238E27FC236}">
+                <a16:creationId xmlns:a16="http://schemas.microsoft.com/office/drawing/2014/main" id="{CA1CCBDA-4CE3-468C-9DBC-1CF81BB2C6E0}"/>
               </a:ext>
             </a:extLst>
           </p:cNvPr>
@@ -3872,8 +3873,8 @@
         </p:blipFill>
         <p:spPr>
           <a:xfrm>
-            <a:off x="1797757" y="5697819"/>
-            <a:ext cx="1230957" cy="1088296"/>
+            <a:off x="-165159" y="5458548"/>
+            <a:ext cx="1566840" cy="1566840"/>
           </a:xfrm>
           <a:prstGeom prst="rect">
             <a:avLst/>
@@ -3882,10 +3883,10 @@
       </p:pic>
       <p:pic>
         <p:nvPicPr>
-          <p:cNvPr id="16" name="図 15">
-            <a:extLst>
-              <a:ext uri="{FF2B5EF4-FFF2-40B4-BE49-F238E27FC236}">
-                <a16:creationId xmlns:a16="http://schemas.microsoft.com/office/drawing/2014/main" id="{CA1CCBDA-4CE3-468C-9DBC-1CF81BB2C6E0}"/>
+          <p:cNvPr id="19" name="図 18">
+            <a:extLst>
+              <a:ext uri="{FF2B5EF4-FFF2-40B4-BE49-F238E27FC236}">
+                <a16:creationId xmlns:a16="http://schemas.microsoft.com/office/drawing/2014/main" id="{3939DF65-2E6C-41C5-B8E9-2C5090DD7B3F}"/>
               </a:ext>
             </a:extLst>
           </p:cNvPr>
@@ -3895,43 +3896,7 @@
           <p:nvPr/>
         </p:nvPicPr>
         <p:blipFill>
-          <a:blip r:embed="rId4">
-            <a:extLst>
-              <a:ext uri="{28A0092B-C50C-407E-A947-70E740481C1C}">
-                <a14:useLocalDpi xmlns:a14="http://schemas.microsoft.com/office/drawing/2010/main" val="0"/>
-              </a:ext>
-            </a:extLst>
-          </a:blip>
-          <a:stretch>
-            <a:fillRect/>
-          </a:stretch>
-        </p:blipFill>
-        <p:spPr>
-          <a:xfrm>
-            <a:off x="-165159" y="5458548"/>
-            <a:ext cx="1566840" cy="1566840"/>
-          </a:xfrm>
-          <a:prstGeom prst="rect">
-            <a:avLst/>
-          </a:prstGeom>
-        </p:spPr>
-      </p:pic>
-      <p:pic>
-        <p:nvPicPr>
-          <p:cNvPr id="19" name="図 18">
-            <a:extLst>
-              <a:ext uri="{FF2B5EF4-FFF2-40B4-BE49-F238E27FC236}">
-                <a16:creationId xmlns:a16="http://schemas.microsoft.com/office/drawing/2014/main" id="{3939DF65-2E6C-41C5-B8E9-2C5090DD7B3F}"/>
-              </a:ext>
-            </a:extLst>
-          </p:cNvPr>
-          <p:cNvPicPr>
-            <a:picLocks noChangeAspect="1"/>
-          </p:cNvPicPr>
-          <p:nvPr/>
-        </p:nvPicPr>
-        <p:blipFill>
-          <a:blip r:embed="rId3">
+          <a:blip r:embed="rId2">
             <a:extLst>
               <a:ext uri="{28A0092B-C50C-407E-A947-70E740481C1C}">
                 <a14:useLocalDpi xmlns:a14="http://schemas.microsoft.com/office/drawing/2010/main" val="0"/>
@@ -4021,7 +3986,7 @@
           <p:nvPr/>
         </p:nvPicPr>
         <p:blipFill>
-          <a:blip r:embed="rId4">
+          <a:blip r:embed="rId3">
             <a:extLst>
               <a:ext uri="{28A0092B-C50C-407E-A947-70E740481C1C}">
                 <a14:useLocalDpi xmlns:a14="http://schemas.microsoft.com/office/drawing/2010/main" val="0"/>
@@ -4111,7 +4076,7 @@
           <p:nvPr/>
         </p:nvPicPr>
         <p:blipFill>
-          <a:blip r:embed="rId4">
+          <a:blip r:embed="rId3">
             <a:extLst>
               <a:ext uri="{28A0092B-C50C-407E-A947-70E740481C1C}">
                 <a14:useLocalDpi xmlns:a14="http://schemas.microsoft.com/office/drawing/2010/main" val="0"/>
@@ -4138,6 +4103,42 @@
             <a:extLst>
               <a:ext uri="{FF2B5EF4-FFF2-40B4-BE49-F238E27FC236}">
                 <a16:creationId xmlns:a16="http://schemas.microsoft.com/office/drawing/2014/main" id="{FCC44C60-C2BB-434C-9929-2F1D4610F0C9}"/>
+              </a:ext>
+            </a:extLst>
+          </p:cNvPr>
+          <p:cNvPicPr>
+            <a:picLocks noChangeAspect="1"/>
+          </p:cNvPicPr>
+          <p:nvPr/>
+        </p:nvPicPr>
+        <p:blipFill>
+          <a:blip r:embed="rId2">
+            <a:extLst>
+              <a:ext uri="{28A0092B-C50C-407E-A947-70E740481C1C}">
+                <a14:useLocalDpi xmlns:a14="http://schemas.microsoft.com/office/drawing/2010/main" val="0"/>
+              </a:ext>
+            </a:extLst>
+          </a:blip>
+          <a:stretch>
+            <a:fillRect/>
+          </a:stretch>
+        </p:blipFill>
+        <p:spPr>
+          <a:xfrm>
+            <a:off x="7606293" y="4608835"/>
+            <a:ext cx="1230957" cy="1088296"/>
+          </a:xfrm>
+          <a:prstGeom prst="rect">
+            <a:avLst/>
+          </a:prstGeom>
+        </p:spPr>
+      </p:pic>
+      <p:pic>
+        <p:nvPicPr>
+          <p:cNvPr id="25" name="図 24">
+            <a:extLst>
+              <a:ext uri="{FF2B5EF4-FFF2-40B4-BE49-F238E27FC236}">
+                <a16:creationId xmlns:a16="http://schemas.microsoft.com/office/drawing/2014/main" id="{BAC1AB7E-52A8-4B9E-9423-C4F87F812809}"/>
               </a:ext>
             </a:extLst>
           </p:cNvPr>
@@ -4148,42 +4149,6 @@
         </p:nvPicPr>
         <p:blipFill>
           <a:blip r:embed="rId3">
-            <a:extLst>
-              <a:ext uri="{28A0092B-C50C-407E-A947-70E740481C1C}">
-                <a14:useLocalDpi xmlns:a14="http://schemas.microsoft.com/office/drawing/2010/main" val="0"/>
-              </a:ext>
-            </a:extLst>
-          </a:blip>
-          <a:stretch>
-            <a:fillRect/>
-          </a:stretch>
-        </p:blipFill>
-        <p:spPr>
-          <a:xfrm>
-            <a:off x="7606293" y="4608835"/>
-            <a:ext cx="1230957" cy="1088296"/>
-          </a:xfrm>
-          <a:prstGeom prst="rect">
-            <a:avLst/>
-          </a:prstGeom>
-        </p:spPr>
-      </p:pic>
-      <p:pic>
-        <p:nvPicPr>
-          <p:cNvPr id="25" name="図 24">
-            <a:extLst>
-              <a:ext uri="{FF2B5EF4-FFF2-40B4-BE49-F238E27FC236}">
-                <a16:creationId xmlns:a16="http://schemas.microsoft.com/office/drawing/2014/main" id="{BAC1AB7E-52A8-4B9E-9423-C4F87F812809}"/>
-              </a:ext>
-            </a:extLst>
-          </p:cNvPr>
-          <p:cNvPicPr>
-            <a:picLocks noChangeAspect="1"/>
-          </p:cNvPicPr>
-          <p:nvPr/>
-        </p:nvPicPr>
-        <p:blipFill>
-          <a:blip r:embed="rId4">
             <a:extLst>
               <a:ext uri="{28A0092B-C50C-407E-A947-70E740481C1C}">
                 <a14:useLocalDpi xmlns:a14="http://schemas.microsoft.com/office/drawing/2010/main" val="0"/>
@@ -4271,7 +4236,7 @@
           <p:nvPr/>
         </p:nvPicPr>
         <p:blipFill>
-          <a:blip r:embed="rId5">
+          <a:blip r:embed="rId4">
             <a:extLst>
               <a:ext uri="{28A0092B-C50C-407E-A947-70E740481C1C}">
                 <a14:useLocalDpi xmlns:a14="http://schemas.microsoft.com/office/drawing/2010/main" val="0"/>
@@ -4432,6 +4397,42 @@
           </a:p>
         </p:txBody>
       </p:sp>
+      <p:pic>
+        <p:nvPicPr>
+          <p:cNvPr id="3" name="図 2">
+            <a:extLst>
+              <a:ext uri="{FF2B5EF4-FFF2-40B4-BE49-F238E27FC236}">
+                <a16:creationId xmlns:a16="http://schemas.microsoft.com/office/drawing/2014/main" id="{62BD0762-E885-410F-8BD3-0AF7124BDCA9}"/>
+              </a:ext>
+            </a:extLst>
+          </p:cNvPr>
+          <p:cNvPicPr>
+            <a:picLocks noChangeAspect="1"/>
+          </p:cNvPicPr>
+          <p:nvPr/>
+        </p:nvPicPr>
+        <p:blipFill>
+          <a:blip r:embed="rId5">
+            <a:extLst>
+              <a:ext uri="{28A0092B-C50C-407E-A947-70E740481C1C}">
+                <a14:useLocalDpi xmlns:a14="http://schemas.microsoft.com/office/drawing/2010/main" val="0"/>
+              </a:ext>
+            </a:extLst>
+          </a:blip>
+          <a:stretch>
+            <a:fillRect/>
+          </a:stretch>
+        </p:blipFill>
+        <p:spPr>
+          <a:xfrm>
+            <a:off x="288080" y="152284"/>
+            <a:ext cx="2088241" cy="1817298"/>
+          </a:xfrm>
+          <a:prstGeom prst="rect">
+            <a:avLst/>
+          </a:prstGeom>
+        </p:spPr>
+      </p:pic>
     </p:spTree>
     <p:extLst>
       <p:ext uri="{BB962C8B-B14F-4D97-AF65-F5344CB8AC3E}">
@@ -4601,7 +4602,7 @@
         <p:spPr>
           <a:xfrm>
             <a:off x="89338" y="3343509"/>
-            <a:ext cx="6391493" cy="923330"/>
+            <a:ext cx="6391493" cy="1200329"/>
           </a:xfrm>
           <a:prstGeom prst="rect">
             <a:avLst/>
@@ -4634,15 +4635,18 @@
           <a:p>
             <a:r>
               <a:rPr lang="ja-JP" altLang="en-US" dirty="0"/>
-              <a:t>一般</a:t>
-            </a:r>
-            <a:r>
-              <a:rPr lang="en-US" altLang="ja-JP" dirty="0"/>
-              <a:t>Enemy</a:t>
+              <a:t>一般敵と同じく追尾する</a:t>
+            </a:r>
+            <a:endParaRPr lang="en-US" altLang="ja-JP" dirty="0"/>
+          </a:p>
+          <a:p>
+            <a:r>
+              <a:rPr kumimoji="1" lang="ja-JP" altLang="en-US" dirty="0"/>
+              <a:t>ボスステージ最後に一般</a:t>
             </a:r>
             <a:r>
               <a:rPr lang="ja-JP" altLang="en-US" dirty="0"/>
-              <a:t>と同じく追尾する</a:t>
+              <a:t>敵と同じ要領で撃破可能</a:t>
             </a:r>
             <a:endParaRPr kumimoji="1" lang="ja-JP" altLang="en-US" dirty="0"/>
           </a:p>
@@ -4750,8 +4754,8 @@
         </p:nvGrpSpPr>
         <p:grpSpPr>
           <a:xfrm>
-            <a:off x="7908305" y="5820610"/>
-            <a:ext cx="395786" cy="361293"/>
+            <a:off x="7658099" y="5511800"/>
+            <a:ext cx="862013" cy="861219"/>
             <a:chOff x="1461135" y="6042782"/>
             <a:chExt cx="251460" cy="259080"/>
           </a:xfrm>
@@ -4777,7 +4781,7 @@
               <a:avLst/>
             </a:prstGeom>
             <a:noFill/>
-            <a:ln w="12700">
+            <a:ln w="34925">
               <a:solidFill>
                 <a:srgbClr val="C00000"/>
               </a:solidFill>
@@ -4832,7 +4836,7 @@
             <a:prstGeom prst="line">
               <a:avLst/>
             </a:prstGeom>
-            <a:ln w="12700">
+            <a:ln w="34925">
               <a:solidFill>
                 <a:srgbClr val="C00000"/>
               </a:solidFill>
@@ -4877,7 +4881,7 @@
             <a:prstGeom prst="line">
               <a:avLst/>
             </a:prstGeom>
-            <a:ln w="12700">
+            <a:ln w="34925">
               <a:solidFill>
                 <a:srgbClr val="C00000"/>
               </a:solidFill>
@@ -4899,6 +4903,129 @@
           </p:style>
         </p:cxnSp>
       </p:grpSp>
+      <p:sp>
+        <p:nvSpPr>
+          <p:cNvPr id="2" name="テキスト ボックス 1">
+            <a:extLst>
+              <a:ext uri="{FF2B5EF4-FFF2-40B4-BE49-F238E27FC236}">
+                <a16:creationId xmlns:a16="http://schemas.microsoft.com/office/drawing/2014/main" id="{22D3C80E-8B08-4CBC-97ED-EF7EB564A6D9}"/>
+              </a:ext>
+            </a:extLst>
+          </p:cNvPr>
+          <p:cNvSpPr txBox="1"/>
+          <p:nvPr/>
+        </p:nvSpPr>
+        <p:spPr>
+          <a:xfrm>
+            <a:off x="6832318" y="3897507"/>
+            <a:ext cx="1569660" cy="369332"/>
+          </a:xfrm>
+          <a:prstGeom prst="rect">
+            <a:avLst/>
+          </a:prstGeom>
+          <a:noFill/>
+        </p:spPr>
+        <p:txBody>
+          <a:bodyPr wrap="none" rtlCol="0">
+            <a:spAutoFit/>
+          </a:bodyPr>
+          <a:lstStyle/>
+          <a:p>
+            <a:r>
+              <a:rPr kumimoji="1" lang="ja-JP" altLang="en-US" dirty="0"/>
+              <a:t>画面イメージ</a:t>
+            </a:r>
+          </a:p>
+        </p:txBody>
+      </p:sp>
+      <p:sp>
+        <p:nvSpPr>
+          <p:cNvPr id="13" name="正方形/長方形 12">
+            <a:extLst>
+              <a:ext uri="{FF2B5EF4-FFF2-40B4-BE49-F238E27FC236}">
+                <a16:creationId xmlns:a16="http://schemas.microsoft.com/office/drawing/2014/main" id="{EB2D26D2-CA22-4D6B-B5B0-D41C3D2AA347}"/>
+              </a:ext>
+            </a:extLst>
+          </p:cNvPr>
+          <p:cNvSpPr/>
+          <p:nvPr/>
+        </p:nvSpPr>
+        <p:spPr>
+          <a:xfrm>
+            <a:off x="10318376" y="4165850"/>
+            <a:ext cx="1456008" cy="988856"/>
+          </a:xfrm>
+          <a:prstGeom prst="rect">
+            <a:avLst/>
+          </a:prstGeom>
+          <a:noFill/>
+          <a:ln>
+            <a:solidFill>
+              <a:schemeClr val="tx1"/>
+            </a:solidFill>
+          </a:ln>
+        </p:spPr>
+        <p:style>
+          <a:lnRef idx="2">
+            <a:schemeClr val="accent1">
+              <a:shade val="50000"/>
+            </a:schemeClr>
+          </a:lnRef>
+          <a:fillRef idx="1">
+            <a:schemeClr val="accent1"/>
+          </a:fillRef>
+          <a:effectRef idx="0">
+            <a:schemeClr val="accent1"/>
+          </a:effectRef>
+          <a:fontRef idx="minor">
+            <a:schemeClr val="lt1"/>
+          </a:fontRef>
+        </p:style>
+        <p:txBody>
+          <a:bodyPr rtlCol="0" anchor="ctr"/>
+          <a:lstStyle/>
+          <a:p>
+            <a:pPr algn="ctr"/>
+            <a:endParaRPr kumimoji="1" lang="ja-JP" altLang="en-US"/>
+          </a:p>
+        </p:txBody>
+      </p:sp>
+      <p:pic>
+        <p:nvPicPr>
+          <p:cNvPr id="4" name="図 3">
+            <a:extLst>
+              <a:ext uri="{FF2B5EF4-FFF2-40B4-BE49-F238E27FC236}">
+                <a16:creationId xmlns:a16="http://schemas.microsoft.com/office/drawing/2014/main" id="{304822B9-95F1-4EE2-8B8F-833C2CFB012A}"/>
+              </a:ext>
+            </a:extLst>
+          </p:cNvPr>
+          <p:cNvPicPr>
+            <a:picLocks noChangeAspect="1"/>
+          </p:cNvPicPr>
+          <p:nvPr/>
+        </p:nvPicPr>
+        <p:blipFill>
+          <a:blip r:embed="rId4">
+            <a:extLst>
+              <a:ext uri="{28A0092B-C50C-407E-A947-70E740481C1C}">
+                <a14:useLocalDpi xmlns:a14="http://schemas.microsoft.com/office/drawing/2010/main" val="0"/>
+              </a:ext>
+            </a:extLst>
+          </a:blip>
+          <a:stretch>
+            <a:fillRect/>
+          </a:stretch>
+        </p:blipFill>
+        <p:spPr>
+          <a:xfrm>
+            <a:off x="10374786" y="3955641"/>
+            <a:ext cx="1456008" cy="1199065"/>
+          </a:xfrm>
+          <a:prstGeom prst="rect">
+            <a:avLst/>
+          </a:prstGeom>
+        </p:spPr>
+      </p:pic>
     </p:spTree>
     <p:extLst>
       <p:ext uri="{BB962C8B-B14F-4D97-AF65-F5344CB8AC3E}">
@@ -4913,6 +5040,493 @@
 </file>
 
 <file path=ppt/slides/slide3.xml><?xml version="1.0" encoding="utf-8"?>
+<p:sld xmlns:a="http://schemas.openxmlformats.org/drawingml/2006/main" xmlns:r="http://schemas.openxmlformats.org/officeDocument/2006/relationships" xmlns:p="http://schemas.openxmlformats.org/presentationml/2006/main">
+  <p:cSld>
+    <p:spTree>
+      <p:nvGrpSpPr>
+        <p:cNvPr id="1" name=""/>
+        <p:cNvGrpSpPr/>
+        <p:nvPr/>
+      </p:nvGrpSpPr>
+      <p:grpSpPr>
+        <a:xfrm>
+          <a:off x="0" y="0"/>
+          <a:ext cx="0" cy="0"/>
+          <a:chOff x="0" y="0"/>
+          <a:chExt cx="0" cy="0"/>
+        </a:xfrm>
+      </p:grpSpPr>
+      <p:pic>
+        <p:nvPicPr>
+          <p:cNvPr id="5" name="図 4">
+            <a:extLst>
+              <a:ext uri="{FF2B5EF4-FFF2-40B4-BE49-F238E27FC236}">
+                <a16:creationId xmlns:a16="http://schemas.microsoft.com/office/drawing/2014/main" id="{58B7B775-AB1F-49DA-AC29-07E3BC5084F4}"/>
+              </a:ext>
+            </a:extLst>
+          </p:cNvPr>
+          <p:cNvPicPr>
+            <a:picLocks noChangeAspect="1"/>
+          </p:cNvPicPr>
+          <p:nvPr/>
+        </p:nvPicPr>
+        <p:blipFill>
+          <a:blip r:embed="rId2">
+            <a:extLst>
+              <a:ext uri="{28A0092B-C50C-407E-A947-70E740481C1C}">
+                <a14:useLocalDpi xmlns:a14="http://schemas.microsoft.com/office/drawing/2010/main" val="0"/>
+              </a:ext>
+            </a:extLst>
+          </a:blip>
+          <a:stretch>
+            <a:fillRect/>
+          </a:stretch>
+        </p:blipFill>
+        <p:spPr>
+          <a:xfrm>
+            <a:off x="-170168" y="56763"/>
+            <a:ext cx="3229181" cy="2578860"/>
+          </a:xfrm>
+          <a:prstGeom prst="rect">
+            <a:avLst/>
+          </a:prstGeom>
+        </p:spPr>
+      </p:pic>
+      <p:sp>
+        <p:nvSpPr>
+          <p:cNvPr id="6" name="テキスト ボックス 5">
+            <a:extLst>
+              <a:ext uri="{FF2B5EF4-FFF2-40B4-BE49-F238E27FC236}">
+                <a16:creationId xmlns:a16="http://schemas.microsoft.com/office/drawing/2014/main" id="{AB4FE6D2-2F23-41F4-9356-02654CF8C90B}"/>
+              </a:ext>
+            </a:extLst>
+          </p:cNvPr>
+          <p:cNvSpPr txBox="1"/>
+          <p:nvPr/>
+        </p:nvSpPr>
+        <p:spPr>
+          <a:xfrm>
+            <a:off x="3059013" y="1156446"/>
+            <a:ext cx="7385150" cy="769441"/>
+          </a:xfrm>
+          <a:prstGeom prst="rect">
+            <a:avLst/>
+          </a:prstGeom>
+          <a:noFill/>
+        </p:spPr>
+        <p:txBody>
+          <a:bodyPr wrap="square" rtlCol="0">
+            <a:spAutoFit/>
+          </a:bodyPr>
+          <a:lstStyle/>
+          <a:p>
+            <a:r>
+              <a:rPr kumimoji="1" lang="ja-JP" altLang="en-US" sz="4400" dirty="0"/>
+              <a:t>ボス</a:t>
+            </a:r>
+            <a:r>
+              <a:rPr kumimoji="1" lang="en-US" altLang="ja-JP" sz="4400" dirty="0"/>
+              <a:t>(</a:t>
+            </a:r>
+            <a:r>
+              <a:rPr kumimoji="1" lang="ja-JP" altLang="en-US" sz="4400" dirty="0"/>
+              <a:t>ロケットランチャー</a:t>
+            </a:r>
+            <a:r>
+              <a:rPr kumimoji="1" lang="en-US" altLang="ja-JP" sz="4400" dirty="0"/>
+              <a:t>)</a:t>
+            </a:r>
+            <a:endParaRPr kumimoji="1" lang="ja-JP" altLang="en-US" sz="4400" dirty="0"/>
+          </a:p>
+        </p:txBody>
+      </p:sp>
+      <p:sp>
+        <p:nvSpPr>
+          <p:cNvPr id="7" name="テキスト ボックス 6">
+            <a:extLst>
+              <a:ext uri="{FF2B5EF4-FFF2-40B4-BE49-F238E27FC236}">
+                <a16:creationId xmlns:a16="http://schemas.microsoft.com/office/drawing/2014/main" id="{4C0B6E83-C98A-45C3-8623-BC1183F914C9}"/>
+              </a:ext>
+            </a:extLst>
+          </p:cNvPr>
+          <p:cNvSpPr txBox="1"/>
+          <p:nvPr/>
+        </p:nvSpPr>
+        <p:spPr>
+          <a:xfrm>
+            <a:off x="89338" y="2635623"/>
+            <a:ext cx="2236510" cy="707886"/>
+          </a:xfrm>
+          <a:prstGeom prst="rect">
+            <a:avLst/>
+          </a:prstGeom>
+          <a:noFill/>
+        </p:spPr>
+        <p:txBody>
+          <a:bodyPr wrap="none" rtlCol="0">
+            <a:spAutoFit/>
+          </a:bodyPr>
+          <a:lstStyle/>
+          <a:p>
+            <a:r>
+              <a:rPr kumimoji="1" lang="ja-JP" altLang="en-US" sz="4000" dirty="0"/>
+              <a:t>ー仕様</a:t>
+            </a:r>
+            <a:r>
+              <a:rPr lang="ja-JP" altLang="en-US" sz="4000" dirty="0"/>
+              <a:t>ー</a:t>
+            </a:r>
+            <a:endParaRPr kumimoji="1" lang="ja-JP" altLang="en-US" sz="4000" dirty="0"/>
+          </a:p>
+        </p:txBody>
+      </p:sp>
+      <p:sp>
+        <p:nvSpPr>
+          <p:cNvPr id="8" name="テキスト ボックス 7">
+            <a:extLst>
+              <a:ext uri="{FF2B5EF4-FFF2-40B4-BE49-F238E27FC236}">
+                <a16:creationId xmlns:a16="http://schemas.microsoft.com/office/drawing/2014/main" id="{F34CE85E-344E-4D74-932F-36535B4971F0}"/>
+              </a:ext>
+            </a:extLst>
+          </p:cNvPr>
+          <p:cNvSpPr txBox="1"/>
+          <p:nvPr/>
+        </p:nvSpPr>
+        <p:spPr>
+          <a:xfrm>
+            <a:off x="89338" y="3343509"/>
+            <a:ext cx="8674169" cy="1477328"/>
+          </a:xfrm>
+          <a:prstGeom prst="rect">
+            <a:avLst/>
+          </a:prstGeom>
+          <a:noFill/>
+        </p:spPr>
+        <p:txBody>
+          <a:bodyPr wrap="none" rtlCol="0">
+            <a:spAutoFit/>
+          </a:bodyPr>
+          <a:lstStyle/>
+          <a:p>
+            <a:r>
+              <a:rPr kumimoji="1" lang="ja-JP" altLang="en-US" dirty="0"/>
+              <a:t>ボスステージにのみ存在</a:t>
+            </a:r>
+            <a:endParaRPr kumimoji="1" lang="en-US" altLang="ja-JP" dirty="0"/>
+          </a:p>
+          <a:p>
+            <a:r>
+              <a:rPr kumimoji="1" lang="en-US" altLang="ja-JP" dirty="0"/>
+              <a:t>Player</a:t>
+            </a:r>
+            <a:r>
+              <a:rPr kumimoji="1" lang="ja-JP" altLang="en-US" dirty="0"/>
+              <a:t>がマップを進んでいるときに</a:t>
+            </a:r>
+            <a:r>
+              <a:rPr kumimoji="1" lang="en-US" altLang="ja-JP" dirty="0"/>
+              <a:t>Player</a:t>
+            </a:r>
+            <a:r>
+              <a:rPr kumimoji="1" lang="ja-JP" altLang="en-US" dirty="0"/>
+              <a:t>の届かない場所から追尾弾を打ってくる</a:t>
+            </a:r>
+            <a:endParaRPr kumimoji="1" lang="en-US" altLang="ja-JP" dirty="0"/>
+          </a:p>
+          <a:p>
+            <a:r>
+              <a:rPr kumimoji="1" lang="ja-JP" altLang="en-US" dirty="0"/>
+              <a:t>一度打つと壁に当たるか</a:t>
+            </a:r>
+            <a:r>
+              <a:rPr kumimoji="1" lang="en-US" altLang="ja-JP" dirty="0"/>
+              <a:t>Player</a:t>
+            </a:r>
+            <a:r>
+              <a:rPr kumimoji="1" lang="ja-JP" altLang="en-US" dirty="0"/>
+              <a:t>に当たるまで二発目は打たない</a:t>
+            </a:r>
+            <a:endParaRPr kumimoji="1" lang="en-US" altLang="ja-JP" dirty="0"/>
+          </a:p>
+          <a:p>
+            <a:r>
+              <a:rPr lang="ja-JP" altLang="en-US" dirty="0"/>
+              <a:t>ボスステージ最後追尾するロケットランチャーの弾を利用して</a:t>
+            </a:r>
+            <a:endParaRPr lang="en-US" altLang="ja-JP" dirty="0"/>
+          </a:p>
+          <a:p>
+            <a:r>
+              <a:rPr lang="ja-JP" altLang="en-US" dirty="0"/>
+              <a:t>ボスを倒す</a:t>
+            </a:r>
+            <a:endParaRPr lang="en-US" altLang="ja-JP" dirty="0"/>
+          </a:p>
+        </p:txBody>
+      </p:sp>
+      <p:sp>
+        <p:nvSpPr>
+          <p:cNvPr id="9" name="テキスト ボックス 8">
+            <a:extLst>
+              <a:ext uri="{FF2B5EF4-FFF2-40B4-BE49-F238E27FC236}">
+                <a16:creationId xmlns:a16="http://schemas.microsoft.com/office/drawing/2014/main" id="{FC8D80BD-C93C-4FF2-9676-129AB62898FF}"/>
+              </a:ext>
+            </a:extLst>
+          </p:cNvPr>
+          <p:cNvSpPr txBox="1"/>
+          <p:nvPr/>
+        </p:nvSpPr>
+        <p:spPr>
+          <a:xfrm>
+            <a:off x="9794172" y="3805174"/>
+            <a:ext cx="1569660" cy="369332"/>
+          </a:xfrm>
+          <a:prstGeom prst="rect">
+            <a:avLst/>
+          </a:prstGeom>
+          <a:noFill/>
+        </p:spPr>
+        <p:txBody>
+          <a:bodyPr wrap="none" rtlCol="0">
+            <a:spAutoFit/>
+          </a:bodyPr>
+          <a:lstStyle/>
+          <a:p>
+            <a:r>
+              <a:rPr kumimoji="1" lang="ja-JP" altLang="en-US" dirty="0"/>
+              <a:t>画面イメージ</a:t>
+            </a:r>
+          </a:p>
+        </p:txBody>
+      </p:sp>
+      <p:sp>
+        <p:nvSpPr>
+          <p:cNvPr id="10" name="正方形/長方形 9">
+            <a:extLst>
+              <a:ext uri="{FF2B5EF4-FFF2-40B4-BE49-F238E27FC236}">
+                <a16:creationId xmlns:a16="http://schemas.microsoft.com/office/drawing/2014/main" id="{8E953A52-52BF-4619-A5DD-20C2017F3BF6}"/>
+              </a:ext>
+            </a:extLst>
+          </p:cNvPr>
+          <p:cNvSpPr/>
+          <p:nvPr/>
+        </p:nvSpPr>
+        <p:spPr>
+          <a:xfrm>
+            <a:off x="7350750" y="4165850"/>
+            <a:ext cx="4841250" cy="2692150"/>
+          </a:xfrm>
+          <a:prstGeom prst="rect">
+            <a:avLst/>
+          </a:prstGeom>
+          <a:noFill/>
+          <a:ln>
+            <a:solidFill>
+              <a:schemeClr val="tx1"/>
+            </a:solidFill>
+          </a:ln>
+        </p:spPr>
+        <p:style>
+          <a:lnRef idx="2">
+            <a:schemeClr val="accent1">
+              <a:shade val="50000"/>
+            </a:schemeClr>
+          </a:lnRef>
+          <a:fillRef idx="1">
+            <a:schemeClr val="accent1"/>
+          </a:fillRef>
+          <a:effectRef idx="0">
+            <a:schemeClr val="accent1"/>
+          </a:effectRef>
+          <a:fontRef idx="minor">
+            <a:schemeClr val="lt1"/>
+          </a:fontRef>
+        </p:style>
+        <p:txBody>
+          <a:bodyPr rtlCol="0" anchor="ctr"/>
+          <a:lstStyle/>
+          <a:p>
+            <a:pPr algn="ctr"/>
+            <a:endParaRPr kumimoji="1" lang="ja-JP" altLang="en-US"/>
+          </a:p>
+        </p:txBody>
+      </p:sp>
+      <p:pic>
+        <p:nvPicPr>
+          <p:cNvPr id="11" name="図 10">
+            <a:extLst>
+              <a:ext uri="{FF2B5EF4-FFF2-40B4-BE49-F238E27FC236}">
+                <a16:creationId xmlns:a16="http://schemas.microsoft.com/office/drawing/2014/main" id="{B8DDA0FF-C482-4D67-BDB0-E5FC8EE15713}"/>
+              </a:ext>
+            </a:extLst>
+          </p:cNvPr>
+          <p:cNvPicPr>
+            <a:picLocks noChangeAspect="1"/>
+          </p:cNvPicPr>
+          <p:nvPr/>
+        </p:nvPicPr>
+        <p:blipFill>
+          <a:blip r:embed="rId3">
+            <a:extLst>
+              <a:ext uri="{28A0092B-C50C-407E-A947-70E740481C1C}">
+                <a14:useLocalDpi xmlns:a14="http://schemas.microsoft.com/office/drawing/2010/main" val="0"/>
+              </a:ext>
+            </a:extLst>
+          </a:blip>
+          <a:stretch>
+            <a:fillRect/>
+          </a:stretch>
+        </p:blipFill>
+        <p:spPr>
+          <a:xfrm>
+            <a:off x="7172425" y="5627594"/>
+            <a:ext cx="1591082" cy="1591082"/>
+          </a:xfrm>
+          <a:prstGeom prst="rect">
+            <a:avLst/>
+          </a:prstGeom>
+        </p:spPr>
+      </p:pic>
+      <p:sp>
+        <p:nvSpPr>
+          <p:cNvPr id="12" name="正方形/長方形 11">
+            <a:extLst>
+              <a:ext uri="{FF2B5EF4-FFF2-40B4-BE49-F238E27FC236}">
+                <a16:creationId xmlns:a16="http://schemas.microsoft.com/office/drawing/2014/main" id="{423660DD-64D5-4D28-8E0F-099C1BF3171F}"/>
+              </a:ext>
+            </a:extLst>
+          </p:cNvPr>
+          <p:cNvSpPr/>
+          <p:nvPr/>
+        </p:nvSpPr>
+        <p:spPr>
+          <a:xfrm>
+            <a:off x="10622338" y="5169789"/>
+            <a:ext cx="1569661" cy="166882"/>
+          </a:xfrm>
+          <a:prstGeom prst="rect">
+            <a:avLst/>
+          </a:prstGeom>
+          <a:solidFill>
+            <a:schemeClr val="tx1"/>
+          </a:solidFill>
+          <a:ln>
+            <a:solidFill>
+              <a:schemeClr val="tx1"/>
+            </a:solidFill>
+          </a:ln>
+        </p:spPr>
+        <p:style>
+          <a:lnRef idx="2">
+            <a:schemeClr val="accent1">
+              <a:shade val="50000"/>
+            </a:schemeClr>
+          </a:lnRef>
+          <a:fillRef idx="1">
+            <a:schemeClr val="accent1"/>
+          </a:fillRef>
+          <a:effectRef idx="0">
+            <a:schemeClr val="accent1"/>
+          </a:effectRef>
+          <a:fontRef idx="minor">
+            <a:schemeClr val="lt1"/>
+          </a:fontRef>
+        </p:style>
+        <p:txBody>
+          <a:bodyPr rtlCol="0" anchor="ctr"/>
+          <a:lstStyle/>
+          <a:p>
+            <a:pPr algn="ctr"/>
+            <a:endParaRPr kumimoji="1" lang="ja-JP" altLang="en-US"/>
+          </a:p>
+        </p:txBody>
+      </p:sp>
+      <p:pic>
+        <p:nvPicPr>
+          <p:cNvPr id="16" name="図 15">
+            <a:extLst>
+              <a:ext uri="{FF2B5EF4-FFF2-40B4-BE49-F238E27FC236}">
+                <a16:creationId xmlns:a16="http://schemas.microsoft.com/office/drawing/2014/main" id="{BD6A6CB5-F353-4B00-87A7-7FCEAB95563C}"/>
+              </a:ext>
+            </a:extLst>
+          </p:cNvPr>
+          <p:cNvPicPr>
+            <a:picLocks noChangeAspect="1"/>
+          </p:cNvPicPr>
+          <p:nvPr/>
+        </p:nvPicPr>
+        <p:blipFill>
+          <a:blip r:embed="rId4">
+            <a:extLst>
+              <a:ext uri="{28A0092B-C50C-407E-A947-70E740481C1C}">
+                <a14:useLocalDpi xmlns:a14="http://schemas.microsoft.com/office/drawing/2010/main" val="0"/>
+              </a:ext>
+            </a:extLst>
+          </a:blip>
+          <a:stretch>
+            <a:fillRect/>
+          </a:stretch>
+        </p:blipFill>
+        <p:spPr>
+          <a:xfrm>
+            <a:off x="10918480" y="4165850"/>
+            <a:ext cx="1184182" cy="1078451"/>
+          </a:xfrm>
+          <a:prstGeom prst="rect">
+            <a:avLst/>
+          </a:prstGeom>
+        </p:spPr>
+      </p:pic>
+      <p:pic>
+        <p:nvPicPr>
+          <p:cNvPr id="18" name="図 17">
+            <a:extLst>
+              <a:ext uri="{FF2B5EF4-FFF2-40B4-BE49-F238E27FC236}">
+                <a16:creationId xmlns:a16="http://schemas.microsoft.com/office/drawing/2014/main" id="{1650F88F-ADB4-4AED-8D44-AE23C25891F8}"/>
+              </a:ext>
+            </a:extLst>
+          </p:cNvPr>
+          <p:cNvPicPr>
+            <a:picLocks noChangeAspect="1"/>
+          </p:cNvPicPr>
+          <p:nvPr/>
+        </p:nvPicPr>
+        <p:blipFill>
+          <a:blip r:embed="rId5">
+            <a:extLst>
+              <a:ext uri="{28A0092B-C50C-407E-A947-70E740481C1C}">
+                <a14:useLocalDpi xmlns:a14="http://schemas.microsoft.com/office/drawing/2010/main" val="0"/>
+              </a:ext>
+            </a:extLst>
+          </a:blip>
+          <a:stretch>
+            <a:fillRect/>
+          </a:stretch>
+        </p:blipFill>
+        <p:spPr>
+          <a:xfrm rot="19443982">
+            <a:off x="8776093" y="5135320"/>
+            <a:ext cx="1414238" cy="501503"/>
+          </a:xfrm>
+          <a:prstGeom prst="rect">
+            <a:avLst/>
+          </a:prstGeom>
+        </p:spPr>
+      </p:pic>
+    </p:spTree>
+    <p:extLst>
+      <p:ext uri="{BB962C8B-B14F-4D97-AF65-F5344CB8AC3E}">
+        <p14:creationId xmlns:p14="http://schemas.microsoft.com/office/powerpoint/2010/main" val="2622506532"/>
+      </p:ext>
+    </p:extLst>
+  </p:cSld>
+  <p:clrMapOvr>
+    <a:masterClrMapping/>
+  </p:clrMapOvr>
+</p:sld>
+</file>
+
+<file path=ppt/slides/slide4.xml><?xml version="1.0" encoding="utf-8"?>
 <p:sld xmlns:a="http://schemas.openxmlformats.org/drawingml/2006/main" xmlns:r="http://schemas.openxmlformats.org/officeDocument/2006/relationships" xmlns:p="http://schemas.openxmlformats.org/presentationml/2006/main">
   <p:cSld>
     <p:spTree>

--- a/仕様書/Enemy.pptx
+++ b/仕様書/Enemy.pptx
@@ -6,9 +6,11 @@
   </p:sldMasterIdLst>
   <p:sldIdLst>
     <p:sldId id="256" r:id="rId2"/>
-    <p:sldId id="258" r:id="rId3"/>
-    <p:sldId id="259" r:id="rId4"/>
-    <p:sldId id="257" r:id="rId5"/>
+    <p:sldId id="260" r:id="rId3"/>
+    <p:sldId id="261" r:id="rId4"/>
+    <p:sldId id="258" r:id="rId5"/>
+    <p:sldId id="259" r:id="rId6"/>
+    <p:sldId id="257" r:id="rId7"/>
   </p:sldIdLst>
   <p:sldSz cx="12192000" cy="6858000"/>
   <p:notesSz cx="6858000" cy="9144000"/>
@@ -262,7 +264,7 @@
           <a:p>
             <a:fld id="{C7C71A78-F6D6-49BC-8378-A440D1241C02}" type="datetimeFigureOut">
               <a:rPr kumimoji="1" lang="ja-JP" altLang="en-US" smtClean="0"/>
-              <a:t>2026/6/3</a:t>
+              <a:t>2026/6/11</a:t>
             </a:fld>
             <a:endParaRPr kumimoji="1" lang="ja-JP" altLang="en-US"/>
           </a:p>
@@ -492,7 +494,7 @@
           <a:p>
             <a:fld id="{C7C71A78-F6D6-49BC-8378-A440D1241C02}" type="datetimeFigureOut">
               <a:rPr kumimoji="1" lang="ja-JP" altLang="en-US" smtClean="0"/>
-              <a:t>2026/6/3</a:t>
+              <a:t>2026/6/11</a:t>
             </a:fld>
             <a:endParaRPr kumimoji="1" lang="ja-JP" altLang="en-US"/>
           </a:p>
@@ -732,7 +734,7 @@
           <a:p>
             <a:fld id="{C7C71A78-F6D6-49BC-8378-A440D1241C02}" type="datetimeFigureOut">
               <a:rPr kumimoji="1" lang="ja-JP" altLang="en-US" smtClean="0"/>
-              <a:t>2026/6/3</a:t>
+              <a:t>2026/6/11</a:t>
             </a:fld>
             <a:endParaRPr kumimoji="1" lang="ja-JP" altLang="en-US"/>
           </a:p>
@@ -962,7 +964,7 @@
           <a:p>
             <a:fld id="{C7C71A78-F6D6-49BC-8378-A440D1241C02}" type="datetimeFigureOut">
               <a:rPr kumimoji="1" lang="ja-JP" altLang="en-US" smtClean="0"/>
-              <a:t>2026/6/3</a:t>
+              <a:t>2026/6/11</a:t>
             </a:fld>
             <a:endParaRPr kumimoji="1" lang="ja-JP" altLang="en-US"/>
           </a:p>
@@ -1237,7 +1239,7 @@
           <a:p>
             <a:fld id="{C7C71A78-F6D6-49BC-8378-A440D1241C02}" type="datetimeFigureOut">
               <a:rPr kumimoji="1" lang="ja-JP" altLang="en-US" smtClean="0"/>
-              <a:t>2026/6/3</a:t>
+              <a:t>2026/6/11</a:t>
             </a:fld>
             <a:endParaRPr kumimoji="1" lang="ja-JP" altLang="en-US"/>
           </a:p>
@@ -1566,7 +1568,7 @@
           <a:p>
             <a:fld id="{C7C71A78-F6D6-49BC-8378-A440D1241C02}" type="datetimeFigureOut">
               <a:rPr kumimoji="1" lang="ja-JP" altLang="en-US" smtClean="0"/>
-              <a:t>2026/6/3</a:t>
+              <a:t>2026/6/11</a:t>
             </a:fld>
             <a:endParaRPr kumimoji="1" lang="ja-JP" altLang="en-US"/>
           </a:p>
@@ -2042,7 +2044,7 @@
           <a:p>
             <a:fld id="{C7C71A78-F6D6-49BC-8378-A440D1241C02}" type="datetimeFigureOut">
               <a:rPr kumimoji="1" lang="ja-JP" altLang="en-US" smtClean="0"/>
-              <a:t>2026/6/3</a:t>
+              <a:t>2026/6/11</a:t>
             </a:fld>
             <a:endParaRPr kumimoji="1" lang="ja-JP" altLang="en-US"/>
           </a:p>
@@ -2183,7 +2185,7 @@
           <a:p>
             <a:fld id="{C7C71A78-F6D6-49BC-8378-A440D1241C02}" type="datetimeFigureOut">
               <a:rPr kumimoji="1" lang="ja-JP" altLang="en-US" smtClean="0"/>
-              <a:t>2026/6/3</a:t>
+              <a:t>2026/6/11</a:t>
             </a:fld>
             <a:endParaRPr kumimoji="1" lang="ja-JP" altLang="en-US"/>
           </a:p>
@@ -2296,7 +2298,7 @@
           <a:p>
             <a:fld id="{C7C71A78-F6D6-49BC-8378-A440D1241C02}" type="datetimeFigureOut">
               <a:rPr kumimoji="1" lang="ja-JP" altLang="en-US" smtClean="0"/>
-              <a:t>2026/6/3</a:t>
+              <a:t>2026/6/11</a:t>
             </a:fld>
             <a:endParaRPr kumimoji="1" lang="ja-JP" altLang="en-US"/>
           </a:p>
@@ -2639,7 +2641,7 @@
           <a:p>
             <a:fld id="{C7C71A78-F6D6-49BC-8378-A440D1241C02}" type="datetimeFigureOut">
               <a:rPr kumimoji="1" lang="ja-JP" altLang="en-US" smtClean="0"/>
-              <a:t>2026/6/3</a:t>
+              <a:t>2026/6/11</a:t>
             </a:fld>
             <a:endParaRPr kumimoji="1" lang="ja-JP" altLang="en-US"/>
           </a:p>
@@ -2927,7 +2929,7 @@
           <a:p>
             <a:fld id="{C7C71A78-F6D6-49BC-8378-A440D1241C02}" type="datetimeFigureOut">
               <a:rPr kumimoji="1" lang="ja-JP" altLang="en-US" smtClean="0"/>
-              <a:t>2026/6/3</a:t>
+              <a:t>2026/6/11</a:t>
             </a:fld>
             <a:endParaRPr kumimoji="1" lang="ja-JP" altLang="en-US"/>
           </a:p>
@@ -3200,7 +3202,7 @@
           <a:p>
             <a:fld id="{C7C71A78-F6D6-49BC-8378-A440D1241C02}" type="datetimeFigureOut">
               <a:rPr kumimoji="1" lang="ja-JP" altLang="en-US" smtClean="0"/>
-              <a:t>2026/6/3</a:t>
+              <a:t>2026/6/11</a:t>
             </a:fld>
             <a:endParaRPr kumimoji="1" lang="ja-JP" altLang="en-US"/>
           </a:p>
@@ -3686,7 +3688,7 @@
         <p:spPr>
           <a:xfrm>
             <a:off x="2471737" y="672510"/>
-            <a:ext cx="1877437" cy="769441"/>
+            <a:ext cx="4006225" cy="769441"/>
           </a:xfrm>
           <a:prstGeom prst="rect">
             <a:avLst/>
@@ -3703,6 +3705,19 @@
               <a:rPr kumimoji="1" lang="ja-JP" altLang="en-US" sz="4400" dirty="0"/>
               <a:t>一般敵</a:t>
             </a:r>
+            <a:r>
+              <a:rPr kumimoji="1" lang="en-US" altLang="ja-JP" sz="4400" dirty="0"/>
+              <a:t>(</a:t>
+            </a:r>
+            <a:r>
+              <a:rPr kumimoji="1" lang="ja-JP" altLang="en-US" sz="4400" dirty="0"/>
+              <a:t>ビーム</a:t>
+            </a:r>
+            <a:r>
+              <a:rPr kumimoji="1" lang="en-US" altLang="ja-JP" sz="4400" dirty="0"/>
+              <a:t>)</a:t>
+            </a:r>
+            <a:endParaRPr kumimoji="1" lang="ja-JP" altLang="en-US" sz="4400" dirty="0"/>
           </a:p>
         </p:txBody>
       </p:sp>
@@ -3720,7 +3735,7 @@
         </p:nvSpPr>
         <p:spPr>
           <a:xfrm>
-            <a:off x="514350" y="2300288"/>
+            <a:off x="385258" y="2042015"/>
             <a:ext cx="2236510" cy="707886"/>
           </a:xfrm>
           <a:prstGeom prst="rect">
@@ -3756,8 +3771,8 @@
         </p:nvSpPr>
         <p:spPr>
           <a:xfrm>
-            <a:off x="514350" y="3004455"/>
-            <a:ext cx="10597773" cy="646331"/>
+            <a:off x="348886" y="2671086"/>
+            <a:ext cx="10597773" cy="923330"/>
           </a:xfrm>
           <a:prstGeom prst="rect">
             <a:avLst/>
@@ -3805,7 +3820,14 @@
               <a:rPr lang="ja-JP" altLang="en-US" dirty="0"/>
               <a:t>が壁などの死角に入ると追尾をやめる</a:t>
             </a:r>
-            <a:endParaRPr kumimoji="1" lang="ja-JP" altLang="en-US" dirty="0"/>
+            <a:endParaRPr lang="en-US" altLang="ja-JP" dirty="0"/>
+          </a:p>
+          <a:p>
+            <a:r>
+              <a:rPr lang="ja-JP" altLang="en-US" dirty="0"/>
+              <a:t>この敵は動かない</a:t>
+            </a:r>
+            <a:endParaRPr lang="en-US" altLang="ja-JP" dirty="0"/>
           </a:p>
         </p:txBody>
       </p:sp>
@@ -4463,12 +4485,60 @@
           <a:chExt cx="0" cy="0"/>
         </a:xfrm>
       </p:grpSpPr>
+      <p:sp>
+        <p:nvSpPr>
+          <p:cNvPr id="4" name="テキスト ボックス 3">
+            <a:extLst>
+              <a:ext uri="{FF2B5EF4-FFF2-40B4-BE49-F238E27FC236}">
+                <a16:creationId xmlns:a16="http://schemas.microsoft.com/office/drawing/2014/main" id="{C7F00E08-C6BD-4E24-9801-A3DD6720955C}"/>
+              </a:ext>
+            </a:extLst>
+          </p:cNvPr>
+          <p:cNvSpPr txBox="1"/>
+          <p:nvPr/>
+        </p:nvSpPr>
+        <p:spPr>
+          <a:xfrm>
+            <a:off x="2471737" y="672510"/>
+            <a:ext cx="3441968" cy="769441"/>
+          </a:xfrm>
+          <a:prstGeom prst="rect">
+            <a:avLst/>
+          </a:prstGeom>
+          <a:noFill/>
+        </p:spPr>
+        <p:txBody>
+          <a:bodyPr wrap="none" rtlCol="0">
+            <a:spAutoFit/>
+          </a:bodyPr>
+          <a:lstStyle/>
+          <a:p>
+            <a:r>
+              <a:rPr kumimoji="1" lang="ja-JP" altLang="en-US" sz="4400" dirty="0"/>
+              <a:t>一般敵</a:t>
+            </a:r>
+            <a:r>
+              <a:rPr kumimoji="1" lang="en-US" altLang="ja-JP" sz="4400" dirty="0"/>
+              <a:t>(</a:t>
+            </a:r>
+            <a:r>
+              <a:rPr kumimoji="1" lang="ja-JP" altLang="en-US" sz="4400" dirty="0"/>
+              <a:t>突進</a:t>
+            </a:r>
+            <a:r>
+              <a:rPr kumimoji="1" lang="en-US" altLang="ja-JP" sz="4400" dirty="0"/>
+              <a:t>)</a:t>
+            </a:r>
+            <a:endParaRPr kumimoji="1" lang="ja-JP" altLang="en-US" sz="4400" dirty="0"/>
+          </a:p>
+        </p:txBody>
+      </p:sp>
       <p:pic>
         <p:nvPicPr>
-          <p:cNvPr id="5" name="図 4">
-            <a:extLst>
-              <a:ext uri="{FF2B5EF4-FFF2-40B4-BE49-F238E27FC236}">
-                <a16:creationId xmlns:a16="http://schemas.microsoft.com/office/drawing/2014/main" id="{A1B5BFB4-88C6-41EB-A4E2-5814C04BEF34}"/>
+          <p:cNvPr id="7" name="図 6">
+            <a:extLst>
+              <a:ext uri="{FF2B5EF4-FFF2-40B4-BE49-F238E27FC236}">
+                <a16:creationId xmlns:a16="http://schemas.microsoft.com/office/drawing/2014/main" id="{59B379EB-F13F-483D-9BC2-BC6826076CA9}"/>
               </a:ext>
             </a:extLst>
           </p:cNvPr>
@@ -4491,8 +4561,8 @@
         </p:blipFill>
         <p:spPr>
           <a:xfrm>
-            <a:off x="-643826" y="-322730"/>
-            <a:ext cx="3702839" cy="2958353"/>
+            <a:off x="288080" y="152284"/>
+            <a:ext cx="2088241" cy="1817298"/>
           </a:xfrm>
           <a:prstGeom prst="rect">
             <a:avLst/>
@@ -4501,10 +4571,10 @@
       </p:pic>
       <p:sp>
         <p:nvSpPr>
-          <p:cNvPr id="6" name="テキスト ボックス 5">
-            <a:extLst>
-              <a:ext uri="{FF2B5EF4-FFF2-40B4-BE49-F238E27FC236}">
-                <a16:creationId xmlns:a16="http://schemas.microsoft.com/office/drawing/2014/main" id="{B8FF6B8C-025E-4417-9D9E-CE6C8307B779}"/>
+          <p:cNvPr id="8" name="テキスト ボックス 7">
+            <a:extLst>
+              <a:ext uri="{FF2B5EF4-FFF2-40B4-BE49-F238E27FC236}">
+                <a16:creationId xmlns:a16="http://schemas.microsoft.com/office/drawing/2014/main" id="{0F8C7D84-F881-4E9A-812A-91128B188608}"/>
               </a:ext>
             </a:extLst>
           </p:cNvPr>
@@ -4513,8 +4583,8 @@
         </p:nvSpPr>
         <p:spPr>
           <a:xfrm>
-            <a:off x="3059013" y="1156446"/>
-            <a:ext cx="5342965" cy="769441"/>
+            <a:off x="514350" y="2300288"/>
+            <a:ext cx="2236510" cy="707886"/>
           </a:xfrm>
           <a:prstGeom prst="rect">
             <a:avLst/>
@@ -4522,37 +4592,25 @@
           <a:noFill/>
         </p:spPr>
         <p:txBody>
-          <a:bodyPr wrap="square" rtlCol="0">
+          <a:bodyPr wrap="none" rtlCol="0">
             <a:spAutoFit/>
           </a:bodyPr>
           <a:lstStyle/>
           <a:p>
             <a:r>
-              <a:rPr kumimoji="1" lang="ja-JP" altLang="en-US" sz="4400" dirty="0"/>
-              <a:t>ボス</a:t>
-            </a:r>
-            <a:r>
-              <a:rPr kumimoji="1" lang="en-US" altLang="ja-JP" sz="4400" dirty="0"/>
-              <a:t>(</a:t>
-            </a:r>
-            <a:r>
-              <a:rPr kumimoji="1" lang="ja-JP" altLang="en-US" sz="4400" dirty="0"/>
-              <a:t>スナイパー</a:t>
-            </a:r>
-            <a:r>
-              <a:rPr kumimoji="1" lang="en-US" altLang="ja-JP" sz="4400" dirty="0"/>
-              <a:t>)</a:t>
-            </a:r>
-            <a:endParaRPr kumimoji="1" lang="ja-JP" altLang="en-US" sz="4400" dirty="0"/>
-          </a:p>
-        </p:txBody>
-      </p:sp>
-      <p:sp>
-        <p:nvSpPr>
-          <p:cNvPr id="7" name="テキスト ボックス 6">
-            <a:extLst>
-              <a:ext uri="{FF2B5EF4-FFF2-40B4-BE49-F238E27FC236}">
-                <a16:creationId xmlns:a16="http://schemas.microsoft.com/office/drawing/2014/main" id="{89C3A1DC-A26A-46CC-BD24-F5130847E9FA}"/>
+              <a:rPr lang="ja-JP" altLang="en-US" sz="4000" dirty="0"/>
+              <a:t>ー仕様ー</a:t>
+            </a:r>
+            <a:endParaRPr kumimoji="1" lang="ja-JP" altLang="en-US" sz="4000" dirty="0"/>
+          </a:p>
+        </p:txBody>
+      </p:sp>
+      <p:sp>
+        <p:nvSpPr>
+          <p:cNvPr id="10" name="テキスト ボックス 9">
+            <a:extLst>
+              <a:ext uri="{FF2B5EF4-FFF2-40B4-BE49-F238E27FC236}">
+                <a16:creationId xmlns:a16="http://schemas.microsoft.com/office/drawing/2014/main" id="{1ADA7C36-D5DD-4A1A-823B-D0160A748146}"/>
               </a:ext>
             </a:extLst>
           </p:cNvPr>
@@ -4561,8 +4619,8 @@
         </p:nvSpPr>
         <p:spPr>
           <a:xfrm>
-            <a:off x="89338" y="2635623"/>
-            <a:ext cx="2236510" cy="707886"/>
+            <a:off x="514350" y="3004455"/>
+            <a:ext cx="5724644" cy="646331"/>
           </a:xfrm>
           <a:prstGeom prst="rect">
             <a:avLst/>
@@ -4576,23 +4634,26 @@
           <a:lstStyle/>
           <a:p>
             <a:r>
-              <a:rPr kumimoji="1" lang="ja-JP" altLang="en-US" sz="4000" dirty="0"/>
-              <a:t>ー仕様</a:t>
-            </a:r>
-            <a:r>
-              <a:rPr lang="ja-JP" altLang="en-US" sz="4000" dirty="0"/>
-              <a:t>ー</a:t>
-            </a:r>
-            <a:endParaRPr kumimoji="1" lang="ja-JP" altLang="en-US" sz="4000" dirty="0"/>
-          </a:p>
-        </p:txBody>
-      </p:sp>
-      <p:sp>
-        <p:nvSpPr>
-          <p:cNvPr id="8" name="テキスト ボックス 7">
-            <a:extLst>
-              <a:ext uri="{FF2B5EF4-FFF2-40B4-BE49-F238E27FC236}">
-                <a16:creationId xmlns:a16="http://schemas.microsoft.com/office/drawing/2014/main" id="{C51E1641-90A0-4F62-B95B-CEEF7F25A9CD}"/>
+              <a:rPr kumimoji="1" lang="ja-JP" altLang="en-US" dirty="0"/>
+              <a:t>プレイヤーを見つけると突進してくる</a:t>
+            </a:r>
+            <a:endParaRPr kumimoji="1" lang="en-US" altLang="ja-JP" dirty="0"/>
+          </a:p>
+          <a:p>
+            <a:r>
+              <a:rPr lang="ja-JP" altLang="en-US" dirty="0"/>
+              <a:t>プレイヤーを見つけるまで特定の場所を往復し続ける</a:t>
+            </a:r>
+            <a:endParaRPr kumimoji="1" lang="ja-JP" altLang="en-US" dirty="0"/>
+          </a:p>
+        </p:txBody>
+      </p:sp>
+      <p:sp>
+        <p:nvSpPr>
+          <p:cNvPr id="11" name="テキスト ボックス 10">
+            <a:extLst>
+              <a:ext uri="{FF2B5EF4-FFF2-40B4-BE49-F238E27FC236}">
+                <a16:creationId xmlns:a16="http://schemas.microsoft.com/office/drawing/2014/main" id="{B335A9C2-6C16-4532-A5D8-A05076C3F417}"/>
               </a:ext>
             </a:extLst>
           </p:cNvPr>
@@ -4601,8 +4662,8 @@
         </p:nvSpPr>
         <p:spPr>
           <a:xfrm>
-            <a:off x="89338" y="3343509"/>
-            <a:ext cx="6391493" cy="1200329"/>
+            <a:off x="514350" y="1969582"/>
+            <a:ext cx="1569660" cy="369332"/>
           </a:xfrm>
           <a:prstGeom prst="rect">
             <a:avLst/>
@@ -4616,420 +4677,24 @@
           <a:lstStyle/>
           <a:p>
             <a:r>
+              <a:rPr kumimoji="1" lang="en-US" altLang="ja-JP" dirty="0"/>
+              <a:t>※</a:t>
+            </a:r>
+            <a:r>
+              <a:rPr lang="ja-JP" altLang="en-US" dirty="0"/>
+              <a:t>一旦仮</a:t>
+            </a:r>
+            <a:r>
               <a:rPr kumimoji="1" lang="ja-JP" altLang="en-US" dirty="0"/>
-              <a:t>ボスステージにのみ存在</a:t>
-            </a:r>
-            <a:endParaRPr kumimoji="1" lang="en-US" altLang="ja-JP" dirty="0"/>
-          </a:p>
-          <a:p>
-            <a:r>
-              <a:rPr kumimoji="1" lang="en-US" altLang="ja-JP" dirty="0"/>
-              <a:t>Player</a:t>
-            </a:r>
-            <a:r>
-              <a:rPr kumimoji="1" lang="ja-JP" altLang="en-US" dirty="0"/>
-              <a:t>がマップを進んでいるところに遠くから狙い撃ちする</a:t>
-            </a:r>
-            <a:endParaRPr kumimoji="1" lang="en-US" altLang="ja-JP" dirty="0"/>
-          </a:p>
-          <a:p>
-            <a:r>
-              <a:rPr lang="ja-JP" altLang="en-US" dirty="0"/>
-              <a:t>一般敵と同じく追尾する</a:t>
-            </a:r>
-            <a:endParaRPr lang="en-US" altLang="ja-JP" dirty="0"/>
-          </a:p>
-          <a:p>
-            <a:r>
-              <a:rPr kumimoji="1" lang="ja-JP" altLang="en-US" dirty="0"/>
-              <a:t>ボスステージ最後に一般</a:t>
-            </a:r>
-            <a:r>
-              <a:rPr lang="ja-JP" altLang="en-US" dirty="0"/>
-              <a:t>敵と同じ要領で撃破可能</a:t>
-            </a:r>
-            <a:endParaRPr kumimoji="1" lang="ja-JP" altLang="en-US" dirty="0"/>
-          </a:p>
-        </p:txBody>
-      </p:sp>
-      <p:sp>
-        <p:nvSpPr>
-          <p:cNvPr id="9" name="正方形/長方形 8">
-            <a:extLst>
-              <a:ext uri="{FF2B5EF4-FFF2-40B4-BE49-F238E27FC236}">
-                <a16:creationId xmlns:a16="http://schemas.microsoft.com/office/drawing/2014/main" id="{E1B8E10E-4299-4DAE-B315-37F513FFD185}"/>
-              </a:ext>
-            </a:extLst>
-          </p:cNvPr>
-          <p:cNvSpPr/>
-          <p:nvPr/>
-        </p:nvSpPr>
-        <p:spPr>
-          <a:xfrm>
-            <a:off x="6933134" y="4165850"/>
-            <a:ext cx="4841250" cy="2692150"/>
-          </a:xfrm>
-          <a:prstGeom prst="rect">
-            <a:avLst/>
-          </a:prstGeom>
-          <a:noFill/>
-          <a:ln>
-            <a:solidFill>
-              <a:schemeClr val="tx1"/>
-            </a:solidFill>
-          </a:ln>
-        </p:spPr>
-        <p:style>
-          <a:lnRef idx="2">
-            <a:schemeClr val="accent1">
-              <a:shade val="50000"/>
-            </a:schemeClr>
-          </a:lnRef>
-          <a:fillRef idx="1">
-            <a:schemeClr val="accent1"/>
-          </a:fillRef>
-          <a:effectRef idx="0">
-            <a:schemeClr val="accent1"/>
-          </a:effectRef>
-          <a:fontRef idx="minor">
-            <a:schemeClr val="lt1"/>
-          </a:fontRef>
-        </p:style>
-        <p:txBody>
-          <a:bodyPr rtlCol="0" anchor="ctr"/>
-          <a:lstStyle/>
-          <a:p>
-            <a:pPr algn="ctr"/>
-            <a:endParaRPr kumimoji="1" lang="ja-JP" altLang="en-US"/>
-          </a:p>
-        </p:txBody>
-      </p:sp>
-      <p:pic>
-        <p:nvPicPr>
-          <p:cNvPr id="22" name="図 21">
-            <a:extLst>
-              <a:ext uri="{FF2B5EF4-FFF2-40B4-BE49-F238E27FC236}">
-                <a16:creationId xmlns:a16="http://schemas.microsoft.com/office/drawing/2014/main" id="{F2089CDE-3E82-406F-AF46-67A295D2DE3F}"/>
-              </a:ext>
-            </a:extLst>
-          </p:cNvPr>
-          <p:cNvPicPr>
-            <a:picLocks noChangeAspect="1"/>
-          </p:cNvPicPr>
-          <p:nvPr/>
-        </p:nvPicPr>
-        <p:blipFill>
-          <a:blip r:embed="rId3">
-            <a:extLst>
-              <a:ext uri="{28A0092B-C50C-407E-A947-70E740481C1C}">
-                <a14:useLocalDpi xmlns:a14="http://schemas.microsoft.com/office/drawing/2010/main" val="0"/>
-              </a:ext>
-            </a:extLst>
-          </a:blip>
-          <a:stretch>
-            <a:fillRect/>
-          </a:stretch>
-        </p:blipFill>
-        <p:spPr>
-          <a:xfrm>
-            <a:off x="6933134" y="4812181"/>
-            <a:ext cx="2346136" cy="2346136"/>
-          </a:xfrm>
-          <a:prstGeom prst="rect">
-            <a:avLst/>
-          </a:prstGeom>
-        </p:spPr>
-      </p:pic>
-      <p:grpSp>
-        <p:nvGrpSpPr>
-          <p:cNvPr id="23" name="グループ化 22">
-            <a:extLst>
-              <a:ext uri="{FF2B5EF4-FFF2-40B4-BE49-F238E27FC236}">
-                <a16:creationId xmlns:a16="http://schemas.microsoft.com/office/drawing/2014/main" id="{8530F3C2-0CA6-457E-A960-423E8784B530}"/>
-              </a:ext>
-            </a:extLst>
-          </p:cNvPr>
-          <p:cNvGrpSpPr/>
-          <p:nvPr/>
-        </p:nvGrpSpPr>
-        <p:grpSpPr>
-          <a:xfrm>
-            <a:off x="7658099" y="5511800"/>
-            <a:ext cx="862013" cy="861219"/>
-            <a:chOff x="1461135" y="6042782"/>
-            <a:chExt cx="251460" cy="259080"/>
-          </a:xfrm>
-        </p:grpSpPr>
-        <p:sp>
-          <p:nvSpPr>
-            <p:cNvPr id="10" name="楕円 9">
-              <a:extLst>
-                <a:ext uri="{FF2B5EF4-FFF2-40B4-BE49-F238E27FC236}">
-                  <a16:creationId xmlns:a16="http://schemas.microsoft.com/office/drawing/2014/main" id="{05D7C4D3-D6CF-422A-B8A8-6576E19ADC2F}"/>
-                </a:ext>
-              </a:extLst>
-            </p:cNvPr>
-            <p:cNvSpPr/>
-            <p:nvPr/>
-          </p:nvSpPr>
-          <p:spPr>
-            <a:xfrm>
-              <a:off x="1461135" y="6042782"/>
-              <a:ext cx="251460" cy="259080"/>
-            </a:xfrm>
-            <a:prstGeom prst="ellipse">
-              <a:avLst/>
-            </a:prstGeom>
-            <a:noFill/>
-            <a:ln w="34925">
-              <a:solidFill>
-                <a:srgbClr val="C00000"/>
-              </a:solidFill>
-            </a:ln>
-          </p:spPr>
-          <p:style>
-            <a:lnRef idx="2">
-              <a:schemeClr val="accent1">
-                <a:shade val="50000"/>
-              </a:schemeClr>
-            </a:lnRef>
-            <a:fillRef idx="1">
-              <a:schemeClr val="accent1"/>
-            </a:fillRef>
-            <a:effectRef idx="0">
-              <a:schemeClr val="accent1"/>
-            </a:effectRef>
-            <a:fontRef idx="minor">
-              <a:schemeClr val="lt1"/>
-            </a:fontRef>
-          </p:style>
-          <p:txBody>
-            <a:bodyPr rtlCol="0" anchor="ctr"/>
-            <a:lstStyle/>
-            <a:p>
-              <a:pPr algn="ctr"/>
-              <a:endParaRPr kumimoji="1" lang="ja-JP" altLang="en-US"/>
-            </a:p>
-          </p:txBody>
-        </p:sp>
-        <p:cxnSp>
-          <p:nvCxnSpPr>
-            <p:cNvPr id="14" name="直線コネクタ 13">
-              <a:extLst>
-                <a:ext uri="{FF2B5EF4-FFF2-40B4-BE49-F238E27FC236}">
-                  <a16:creationId xmlns:a16="http://schemas.microsoft.com/office/drawing/2014/main" id="{F6E595DA-9D29-4DD5-9289-28B97BEC4BEA}"/>
-                </a:ext>
-              </a:extLst>
-            </p:cNvPr>
-            <p:cNvCxnSpPr>
-              <a:cxnSpLocks/>
-              <a:stCxn id="10" idx="0"/>
-              <a:endCxn id="10" idx="4"/>
-            </p:cNvCxnSpPr>
-            <p:nvPr/>
-          </p:nvCxnSpPr>
-          <p:spPr>
-            <a:xfrm>
-              <a:off x="1586865" y="6042782"/>
-              <a:ext cx="0" cy="259080"/>
-            </a:xfrm>
-            <a:prstGeom prst="line">
-              <a:avLst/>
-            </a:prstGeom>
-            <a:ln w="34925">
-              <a:solidFill>
-                <a:srgbClr val="C00000"/>
-              </a:solidFill>
-            </a:ln>
-          </p:spPr>
-          <p:style>
-            <a:lnRef idx="1">
-              <a:schemeClr val="accent1"/>
-            </a:lnRef>
-            <a:fillRef idx="0">
-              <a:schemeClr val="accent1"/>
-            </a:fillRef>
-            <a:effectRef idx="0">
-              <a:schemeClr val="accent1"/>
-            </a:effectRef>
-            <a:fontRef idx="minor">
-              <a:schemeClr val="tx1"/>
-            </a:fontRef>
-          </p:style>
-        </p:cxnSp>
-        <p:cxnSp>
-          <p:nvCxnSpPr>
-            <p:cNvPr id="18" name="直線コネクタ 17">
-              <a:extLst>
-                <a:ext uri="{FF2B5EF4-FFF2-40B4-BE49-F238E27FC236}">
-                  <a16:creationId xmlns:a16="http://schemas.microsoft.com/office/drawing/2014/main" id="{EF09BFC8-05F7-4657-8E35-9F55956F7980}"/>
-                </a:ext>
-              </a:extLst>
-            </p:cNvPr>
-            <p:cNvCxnSpPr>
-              <a:cxnSpLocks/>
-              <a:stCxn id="10" idx="6"/>
-              <a:endCxn id="10" idx="2"/>
-            </p:cNvCxnSpPr>
-            <p:nvPr/>
-          </p:nvCxnSpPr>
-          <p:spPr>
-            <a:xfrm flipH="1">
-              <a:off x="1461135" y="6172322"/>
-              <a:ext cx="251460" cy="0"/>
-            </a:xfrm>
-            <a:prstGeom prst="line">
-              <a:avLst/>
-            </a:prstGeom>
-            <a:ln w="34925">
-              <a:solidFill>
-                <a:srgbClr val="C00000"/>
-              </a:solidFill>
-            </a:ln>
-          </p:spPr>
-          <p:style>
-            <a:lnRef idx="1">
-              <a:schemeClr val="accent1"/>
-            </a:lnRef>
-            <a:fillRef idx="0">
-              <a:schemeClr val="accent1"/>
-            </a:fillRef>
-            <a:effectRef idx="0">
-              <a:schemeClr val="accent1"/>
-            </a:effectRef>
-            <a:fontRef idx="minor">
-              <a:schemeClr val="tx1"/>
-            </a:fontRef>
-          </p:style>
-        </p:cxnSp>
-      </p:grpSp>
-      <p:sp>
-        <p:nvSpPr>
-          <p:cNvPr id="2" name="テキスト ボックス 1">
-            <a:extLst>
-              <a:ext uri="{FF2B5EF4-FFF2-40B4-BE49-F238E27FC236}">
-                <a16:creationId xmlns:a16="http://schemas.microsoft.com/office/drawing/2014/main" id="{22D3C80E-8B08-4CBC-97ED-EF7EB564A6D9}"/>
-              </a:ext>
-            </a:extLst>
-          </p:cNvPr>
-          <p:cNvSpPr txBox="1"/>
-          <p:nvPr/>
-        </p:nvSpPr>
-        <p:spPr>
-          <a:xfrm>
-            <a:off x="6832318" y="3897507"/>
-            <a:ext cx="1569660" cy="369332"/>
-          </a:xfrm>
-          <a:prstGeom prst="rect">
-            <a:avLst/>
-          </a:prstGeom>
-          <a:noFill/>
-        </p:spPr>
-        <p:txBody>
-          <a:bodyPr wrap="none" rtlCol="0">
-            <a:spAutoFit/>
-          </a:bodyPr>
-          <a:lstStyle/>
-          <a:p>
-            <a:r>
-              <a:rPr kumimoji="1" lang="ja-JP" altLang="en-US" dirty="0"/>
-              <a:t>画面イメージ</a:t>
-            </a:r>
-          </a:p>
-        </p:txBody>
-      </p:sp>
-      <p:sp>
-        <p:nvSpPr>
-          <p:cNvPr id="13" name="正方形/長方形 12">
-            <a:extLst>
-              <a:ext uri="{FF2B5EF4-FFF2-40B4-BE49-F238E27FC236}">
-                <a16:creationId xmlns:a16="http://schemas.microsoft.com/office/drawing/2014/main" id="{EB2D26D2-CA22-4D6B-B5B0-D41C3D2AA347}"/>
-              </a:ext>
-            </a:extLst>
-          </p:cNvPr>
-          <p:cNvSpPr/>
-          <p:nvPr/>
-        </p:nvSpPr>
-        <p:spPr>
-          <a:xfrm>
-            <a:off x="10318376" y="4165850"/>
-            <a:ext cx="1456008" cy="988856"/>
-          </a:xfrm>
-          <a:prstGeom prst="rect">
-            <a:avLst/>
-          </a:prstGeom>
-          <a:noFill/>
-          <a:ln>
-            <a:solidFill>
-              <a:schemeClr val="tx1"/>
-            </a:solidFill>
-          </a:ln>
-        </p:spPr>
-        <p:style>
-          <a:lnRef idx="2">
-            <a:schemeClr val="accent1">
-              <a:shade val="50000"/>
-            </a:schemeClr>
-          </a:lnRef>
-          <a:fillRef idx="1">
-            <a:schemeClr val="accent1"/>
-          </a:fillRef>
-          <a:effectRef idx="0">
-            <a:schemeClr val="accent1"/>
-          </a:effectRef>
-          <a:fontRef idx="minor">
-            <a:schemeClr val="lt1"/>
-          </a:fontRef>
-        </p:style>
-        <p:txBody>
-          <a:bodyPr rtlCol="0" anchor="ctr"/>
-          <a:lstStyle/>
-          <a:p>
-            <a:pPr algn="ctr"/>
-            <a:endParaRPr kumimoji="1" lang="ja-JP" altLang="en-US"/>
-          </a:p>
-        </p:txBody>
-      </p:sp>
-      <p:pic>
-        <p:nvPicPr>
-          <p:cNvPr id="4" name="図 3">
-            <a:extLst>
-              <a:ext uri="{FF2B5EF4-FFF2-40B4-BE49-F238E27FC236}">
-                <a16:creationId xmlns:a16="http://schemas.microsoft.com/office/drawing/2014/main" id="{304822B9-95F1-4EE2-8B8F-833C2CFB012A}"/>
-              </a:ext>
-            </a:extLst>
-          </p:cNvPr>
-          <p:cNvPicPr>
-            <a:picLocks noChangeAspect="1"/>
-          </p:cNvPicPr>
-          <p:nvPr/>
-        </p:nvPicPr>
-        <p:blipFill>
-          <a:blip r:embed="rId4">
-            <a:extLst>
-              <a:ext uri="{28A0092B-C50C-407E-A947-70E740481C1C}">
-                <a14:useLocalDpi xmlns:a14="http://schemas.microsoft.com/office/drawing/2010/main" val="0"/>
-              </a:ext>
-            </a:extLst>
-          </a:blip>
-          <a:stretch>
-            <a:fillRect/>
-          </a:stretch>
-        </p:blipFill>
-        <p:spPr>
-          <a:xfrm>
-            <a:off x="10374786" y="3955641"/>
-            <a:ext cx="1456008" cy="1199065"/>
-          </a:xfrm>
-          <a:prstGeom prst="rect">
-            <a:avLst/>
-          </a:prstGeom>
-        </p:spPr>
-      </p:pic>
+              <a:t>画像</a:t>
+            </a:r>
+          </a:p>
+        </p:txBody>
+      </p:sp>
     </p:spTree>
     <p:extLst>
       <p:ext uri="{BB962C8B-B14F-4D97-AF65-F5344CB8AC3E}">
-        <p14:creationId xmlns:p14="http://schemas.microsoft.com/office/powerpoint/2010/main" val="3053821899"/>
+        <p14:creationId xmlns:p14="http://schemas.microsoft.com/office/powerpoint/2010/main" val="2274978977"/>
       </p:ext>
     </p:extLst>
   </p:cSld>
@@ -5056,12 +4721,60 @@
           <a:chExt cx="0" cy="0"/>
         </a:xfrm>
       </p:grpSpPr>
+      <p:sp>
+        <p:nvSpPr>
+          <p:cNvPr id="4" name="テキスト ボックス 3">
+            <a:extLst>
+              <a:ext uri="{FF2B5EF4-FFF2-40B4-BE49-F238E27FC236}">
+                <a16:creationId xmlns:a16="http://schemas.microsoft.com/office/drawing/2014/main" id="{C7F00E08-C6BD-4E24-9801-A3DD6720955C}"/>
+              </a:ext>
+            </a:extLst>
+          </p:cNvPr>
+          <p:cNvSpPr txBox="1"/>
+          <p:nvPr/>
+        </p:nvSpPr>
+        <p:spPr>
+          <a:xfrm>
+            <a:off x="2471737" y="672510"/>
+            <a:ext cx="4570482" cy="769441"/>
+          </a:xfrm>
+          <a:prstGeom prst="rect">
+            <a:avLst/>
+          </a:prstGeom>
+          <a:noFill/>
+        </p:spPr>
+        <p:txBody>
+          <a:bodyPr wrap="none" rtlCol="0">
+            <a:spAutoFit/>
+          </a:bodyPr>
+          <a:lstStyle/>
+          <a:p>
+            <a:r>
+              <a:rPr kumimoji="1" lang="ja-JP" altLang="en-US" sz="4400" dirty="0"/>
+              <a:t>一般敵</a:t>
+            </a:r>
+            <a:r>
+              <a:rPr kumimoji="1" lang="en-US" altLang="ja-JP" sz="4400" dirty="0"/>
+              <a:t>(</a:t>
+            </a:r>
+            <a:r>
+              <a:rPr kumimoji="1" lang="ja-JP" altLang="en-US" sz="4400" dirty="0"/>
+              <a:t>バースト</a:t>
+            </a:r>
+            <a:r>
+              <a:rPr kumimoji="1" lang="en-US" altLang="ja-JP" sz="4400" dirty="0"/>
+              <a:t>)</a:t>
+            </a:r>
+            <a:endParaRPr kumimoji="1" lang="ja-JP" altLang="en-US" sz="4400" dirty="0"/>
+          </a:p>
+        </p:txBody>
+      </p:sp>
       <p:pic>
         <p:nvPicPr>
-          <p:cNvPr id="5" name="図 4">
-            <a:extLst>
-              <a:ext uri="{FF2B5EF4-FFF2-40B4-BE49-F238E27FC236}">
-                <a16:creationId xmlns:a16="http://schemas.microsoft.com/office/drawing/2014/main" id="{58B7B775-AB1F-49DA-AC29-07E3BC5084F4}"/>
+          <p:cNvPr id="7" name="図 6">
+            <a:extLst>
+              <a:ext uri="{FF2B5EF4-FFF2-40B4-BE49-F238E27FC236}">
+                <a16:creationId xmlns:a16="http://schemas.microsoft.com/office/drawing/2014/main" id="{59B379EB-F13F-483D-9BC2-BC6826076CA9}"/>
               </a:ext>
             </a:extLst>
           </p:cNvPr>
@@ -5084,8 +4797,8 @@
         </p:blipFill>
         <p:spPr>
           <a:xfrm>
-            <a:off x="-170168" y="56763"/>
-            <a:ext cx="3229181" cy="2578860"/>
+            <a:off x="288080" y="152284"/>
+            <a:ext cx="2088241" cy="1817298"/>
           </a:xfrm>
           <a:prstGeom prst="rect">
             <a:avLst/>
@@ -5094,10 +4807,10 @@
       </p:pic>
       <p:sp>
         <p:nvSpPr>
-          <p:cNvPr id="6" name="テキスト ボックス 5">
-            <a:extLst>
-              <a:ext uri="{FF2B5EF4-FFF2-40B4-BE49-F238E27FC236}">
-                <a16:creationId xmlns:a16="http://schemas.microsoft.com/office/drawing/2014/main" id="{AB4FE6D2-2F23-41F4-9356-02654CF8C90B}"/>
+          <p:cNvPr id="8" name="テキスト ボックス 7">
+            <a:extLst>
+              <a:ext uri="{FF2B5EF4-FFF2-40B4-BE49-F238E27FC236}">
+                <a16:creationId xmlns:a16="http://schemas.microsoft.com/office/drawing/2014/main" id="{0F8C7D84-F881-4E9A-812A-91128B188608}"/>
               </a:ext>
             </a:extLst>
           </p:cNvPr>
@@ -5106,8 +4819,8 @@
         </p:nvSpPr>
         <p:spPr>
           <a:xfrm>
-            <a:off x="3059013" y="1156446"/>
-            <a:ext cx="7385150" cy="769441"/>
+            <a:off x="514350" y="2300288"/>
+            <a:ext cx="2236510" cy="707886"/>
           </a:xfrm>
           <a:prstGeom prst="rect">
             <a:avLst/>
@@ -5115,37 +4828,25 @@
           <a:noFill/>
         </p:spPr>
         <p:txBody>
-          <a:bodyPr wrap="square" rtlCol="0">
+          <a:bodyPr wrap="none" rtlCol="0">
             <a:spAutoFit/>
           </a:bodyPr>
           <a:lstStyle/>
           <a:p>
             <a:r>
-              <a:rPr kumimoji="1" lang="ja-JP" altLang="en-US" sz="4400" dirty="0"/>
-              <a:t>ボス</a:t>
-            </a:r>
-            <a:r>
-              <a:rPr kumimoji="1" lang="en-US" altLang="ja-JP" sz="4400" dirty="0"/>
-              <a:t>(</a:t>
-            </a:r>
-            <a:r>
-              <a:rPr kumimoji="1" lang="ja-JP" altLang="en-US" sz="4400" dirty="0"/>
-              <a:t>ロケットランチャー</a:t>
-            </a:r>
-            <a:r>
-              <a:rPr kumimoji="1" lang="en-US" altLang="ja-JP" sz="4400" dirty="0"/>
-              <a:t>)</a:t>
-            </a:r>
-            <a:endParaRPr kumimoji="1" lang="ja-JP" altLang="en-US" sz="4400" dirty="0"/>
-          </a:p>
-        </p:txBody>
-      </p:sp>
-      <p:sp>
-        <p:nvSpPr>
-          <p:cNvPr id="7" name="テキスト ボックス 6">
-            <a:extLst>
-              <a:ext uri="{FF2B5EF4-FFF2-40B4-BE49-F238E27FC236}">
-                <a16:creationId xmlns:a16="http://schemas.microsoft.com/office/drawing/2014/main" id="{4C0B6E83-C98A-45C3-8623-BC1183F914C9}"/>
+              <a:rPr lang="ja-JP" altLang="en-US" sz="4000" dirty="0"/>
+              <a:t>ー仕様ー</a:t>
+            </a:r>
+            <a:endParaRPr kumimoji="1" lang="ja-JP" altLang="en-US" sz="4000" dirty="0"/>
+          </a:p>
+        </p:txBody>
+      </p:sp>
+      <p:sp>
+        <p:nvSpPr>
+          <p:cNvPr id="10" name="テキスト ボックス 9">
+            <a:extLst>
+              <a:ext uri="{FF2B5EF4-FFF2-40B4-BE49-F238E27FC236}">
+                <a16:creationId xmlns:a16="http://schemas.microsoft.com/office/drawing/2014/main" id="{1ADA7C36-D5DD-4A1A-823B-D0160A748146}"/>
               </a:ext>
             </a:extLst>
           </p:cNvPr>
@@ -5154,8 +4855,8 @@
         </p:nvSpPr>
         <p:spPr>
           <a:xfrm>
-            <a:off x="89338" y="2635623"/>
-            <a:ext cx="2236510" cy="707886"/>
+            <a:off x="514350" y="3004455"/>
+            <a:ext cx="3082895" cy="923330"/>
           </a:xfrm>
           <a:prstGeom prst="rect">
             <a:avLst/>
@@ -5169,23 +4870,44 @@
           <a:lstStyle/>
           <a:p>
             <a:r>
-              <a:rPr kumimoji="1" lang="ja-JP" altLang="en-US" sz="4000" dirty="0"/>
-              <a:t>ー仕様</a:t>
-            </a:r>
-            <a:r>
-              <a:rPr lang="ja-JP" altLang="en-US" sz="4000" dirty="0"/>
-              <a:t>ー</a:t>
-            </a:r>
-            <a:endParaRPr kumimoji="1" lang="ja-JP" altLang="en-US" sz="4000" dirty="0"/>
-          </a:p>
-        </p:txBody>
-      </p:sp>
-      <p:sp>
-        <p:nvSpPr>
-          <p:cNvPr id="8" name="テキスト ボックス 7">
-            <a:extLst>
-              <a:ext uri="{FF2B5EF4-FFF2-40B4-BE49-F238E27FC236}">
-                <a16:creationId xmlns:a16="http://schemas.microsoft.com/office/drawing/2014/main" id="{F34CE85E-344E-4D74-932F-36535B4971F0}"/>
+              <a:rPr kumimoji="1" lang="ja-JP" altLang="en-US" dirty="0"/>
+              <a:t>ビームとほぼ同じ</a:t>
+            </a:r>
+            <a:endParaRPr kumimoji="1" lang="en-US" altLang="ja-JP" dirty="0"/>
+          </a:p>
+          <a:p>
+            <a:r>
+              <a:rPr kumimoji="1" lang="ja-JP" altLang="en-US" dirty="0"/>
+              <a:t>一度で</a:t>
+            </a:r>
+            <a:r>
+              <a:rPr kumimoji="1" lang="en-US" altLang="ja-JP" dirty="0"/>
+              <a:t>3</a:t>
+            </a:r>
+            <a:r>
+              <a:rPr kumimoji="1" lang="ja-JP" altLang="en-US" dirty="0"/>
+              <a:t>発の弾を出して攻撃</a:t>
+            </a:r>
+            <a:endParaRPr kumimoji="1" lang="en-US" altLang="ja-JP" dirty="0"/>
+          </a:p>
+          <a:p>
+            <a:r>
+              <a:rPr kumimoji="1" lang="en-US" altLang="ja-JP" dirty="0"/>
+              <a:t>※</a:t>
+            </a:r>
+            <a:r>
+              <a:rPr kumimoji="1" lang="ja-JP" altLang="en-US" dirty="0"/>
+              <a:t>赤色にする予定</a:t>
+            </a:r>
+          </a:p>
+        </p:txBody>
+      </p:sp>
+      <p:sp>
+        <p:nvSpPr>
+          <p:cNvPr id="11" name="テキスト ボックス 10">
+            <a:extLst>
+              <a:ext uri="{FF2B5EF4-FFF2-40B4-BE49-F238E27FC236}">
+                <a16:creationId xmlns:a16="http://schemas.microsoft.com/office/drawing/2014/main" id="{B335A9C2-6C16-4532-A5D8-A05076C3F417}"/>
               </a:ext>
             </a:extLst>
           </p:cNvPr>
@@ -5194,8 +4916,8 @@
         </p:nvSpPr>
         <p:spPr>
           <a:xfrm>
-            <a:off x="89338" y="3343509"/>
-            <a:ext cx="8674169" cy="1477328"/>
+            <a:off x="514350" y="1969582"/>
+            <a:ext cx="1569660" cy="369332"/>
           </a:xfrm>
           <a:prstGeom prst="rect">
             <a:avLst/>
@@ -5209,154 +4931,56 @@
           <a:lstStyle/>
           <a:p>
             <a:r>
+              <a:rPr kumimoji="1" lang="en-US" altLang="ja-JP" dirty="0"/>
+              <a:t>※</a:t>
+            </a:r>
+            <a:r>
+              <a:rPr lang="ja-JP" altLang="en-US" dirty="0"/>
+              <a:t>一旦仮</a:t>
+            </a:r>
+            <a:r>
               <a:rPr kumimoji="1" lang="ja-JP" altLang="en-US" dirty="0"/>
-              <a:t>ボスステージにのみ存在</a:t>
-            </a:r>
-            <a:endParaRPr kumimoji="1" lang="en-US" altLang="ja-JP" dirty="0"/>
-          </a:p>
-          <a:p>
-            <a:r>
-              <a:rPr kumimoji="1" lang="en-US" altLang="ja-JP" dirty="0"/>
-              <a:t>Player</a:t>
-            </a:r>
-            <a:r>
-              <a:rPr kumimoji="1" lang="ja-JP" altLang="en-US" dirty="0"/>
-              <a:t>がマップを進んでいるときに</a:t>
-            </a:r>
-            <a:r>
-              <a:rPr kumimoji="1" lang="en-US" altLang="ja-JP" dirty="0"/>
-              <a:t>Player</a:t>
-            </a:r>
-            <a:r>
-              <a:rPr kumimoji="1" lang="ja-JP" altLang="en-US" dirty="0"/>
-              <a:t>の届かない場所から追尾弾を打ってくる</a:t>
-            </a:r>
-            <a:endParaRPr kumimoji="1" lang="en-US" altLang="ja-JP" dirty="0"/>
-          </a:p>
-          <a:p>
-            <a:r>
-              <a:rPr kumimoji="1" lang="ja-JP" altLang="en-US" dirty="0"/>
-              <a:t>一度打つと壁に当たるか</a:t>
-            </a:r>
-            <a:r>
-              <a:rPr kumimoji="1" lang="en-US" altLang="ja-JP" dirty="0"/>
-              <a:t>Player</a:t>
-            </a:r>
-            <a:r>
-              <a:rPr kumimoji="1" lang="ja-JP" altLang="en-US" dirty="0"/>
-              <a:t>に当たるまで二発目は打たない</a:t>
-            </a:r>
-            <a:endParaRPr kumimoji="1" lang="en-US" altLang="ja-JP" dirty="0"/>
-          </a:p>
-          <a:p>
-            <a:r>
-              <a:rPr lang="ja-JP" altLang="en-US" dirty="0"/>
-              <a:t>ボスステージ最後追尾するロケットランチャーの弾を利用して</a:t>
-            </a:r>
-            <a:endParaRPr lang="en-US" altLang="ja-JP" dirty="0"/>
-          </a:p>
-          <a:p>
-            <a:r>
-              <a:rPr lang="ja-JP" altLang="en-US" dirty="0"/>
-              <a:t>ボスを倒す</a:t>
-            </a:r>
-            <a:endParaRPr lang="en-US" altLang="ja-JP" dirty="0"/>
-          </a:p>
-        </p:txBody>
-      </p:sp>
-      <p:sp>
-        <p:nvSpPr>
-          <p:cNvPr id="9" name="テキスト ボックス 8">
-            <a:extLst>
-              <a:ext uri="{FF2B5EF4-FFF2-40B4-BE49-F238E27FC236}">
-                <a16:creationId xmlns:a16="http://schemas.microsoft.com/office/drawing/2014/main" id="{FC8D80BD-C93C-4FF2-9676-129AB62898FF}"/>
-              </a:ext>
-            </a:extLst>
-          </p:cNvPr>
-          <p:cNvSpPr txBox="1"/>
-          <p:nvPr/>
-        </p:nvSpPr>
-        <p:spPr>
-          <a:xfrm>
-            <a:off x="9794172" y="3805174"/>
-            <a:ext cx="1569660" cy="369332"/>
-          </a:xfrm>
-          <a:prstGeom prst="rect">
-            <a:avLst/>
-          </a:prstGeom>
-          <a:noFill/>
-        </p:spPr>
-        <p:txBody>
-          <a:bodyPr wrap="none" rtlCol="0">
-            <a:spAutoFit/>
-          </a:bodyPr>
-          <a:lstStyle/>
-          <a:p>
-            <a:r>
-              <a:rPr kumimoji="1" lang="ja-JP" altLang="en-US" dirty="0"/>
-              <a:t>画面イメージ</a:t>
-            </a:r>
-          </a:p>
-        </p:txBody>
-      </p:sp>
-      <p:sp>
-        <p:nvSpPr>
-          <p:cNvPr id="10" name="正方形/長方形 9">
-            <a:extLst>
-              <a:ext uri="{FF2B5EF4-FFF2-40B4-BE49-F238E27FC236}">
-                <a16:creationId xmlns:a16="http://schemas.microsoft.com/office/drawing/2014/main" id="{8E953A52-52BF-4619-A5DD-20C2017F3BF6}"/>
-              </a:ext>
-            </a:extLst>
-          </p:cNvPr>
-          <p:cNvSpPr/>
-          <p:nvPr/>
-        </p:nvSpPr>
-        <p:spPr>
-          <a:xfrm>
-            <a:off x="7350750" y="4165850"/>
-            <a:ext cx="4841250" cy="2692150"/>
-          </a:xfrm>
-          <a:prstGeom prst="rect">
-            <a:avLst/>
-          </a:prstGeom>
-          <a:noFill/>
-          <a:ln>
-            <a:solidFill>
-              <a:schemeClr val="tx1"/>
-            </a:solidFill>
-          </a:ln>
-        </p:spPr>
-        <p:style>
-          <a:lnRef idx="2">
-            <a:schemeClr val="accent1">
-              <a:shade val="50000"/>
-            </a:schemeClr>
-          </a:lnRef>
-          <a:fillRef idx="1">
-            <a:schemeClr val="accent1"/>
-          </a:fillRef>
-          <a:effectRef idx="0">
-            <a:schemeClr val="accent1"/>
-          </a:effectRef>
-          <a:fontRef idx="minor">
-            <a:schemeClr val="lt1"/>
-          </a:fontRef>
-        </p:style>
-        <p:txBody>
-          <a:bodyPr rtlCol="0" anchor="ctr"/>
-          <a:lstStyle/>
-          <a:p>
-            <a:pPr algn="ctr"/>
-            <a:endParaRPr kumimoji="1" lang="ja-JP" altLang="en-US"/>
-          </a:p>
-        </p:txBody>
-      </p:sp>
+              <a:t>画像</a:t>
+            </a:r>
+          </a:p>
+        </p:txBody>
+      </p:sp>
+    </p:spTree>
+    <p:extLst>
+      <p:ext uri="{BB962C8B-B14F-4D97-AF65-F5344CB8AC3E}">
+        <p14:creationId xmlns:p14="http://schemas.microsoft.com/office/powerpoint/2010/main" val="3276220356"/>
+      </p:ext>
+    </p:extLst>
+  </p:cSld>
+  <p:clrMapOvr>
+    <a:masterClrMapping/>
+  </p:clrMapOvr>
+</p:sld>
+</file>
+
+<file path=ppt/slides/slide4.xml><?xml version="1.0" encoding="utf-8"?>
+<p:sld xmlns:a="http://schemas.openxmlformats.org/drawingml/2006/main" xmlns:r="http://schemas.openxmlformats.org/officeDocument/2006/relationships" xmlns:p="http://schemas.openxmlformats.org/presentationml/2006/main">
+  <p:cSld>
+    <p:spTree>
+      <p:nvGrpSpPr>
+        <p:cNvPr id="1" name=""/>
+        <p:cNvGrpSpPr/>
+        <p:nvPr/>
+      </p:nvGrpSpPr>
+      <p:grpSpPr>
+        <a:xfrm>
+          <a:off x="0" y="0"/>
+          <a:ext cx="0" cy="0"/>
+          <a:chOff x="0" y="0"/>
+          <a:chExt cx="0" cy="0"/>
+        </a:xfrm>
+      </p:grpSpPr>
       <p:pic>
         <p:nvPicPr>
-          <p:cNvPr id="11" name="図 10">
-            <a:extLst>
-              <a:ext uri="{FF2B5EF4-FFF2-40B4-BE49-F238E27FC236}">
-                <a16:creationId xmlns:a16="http://schemas.microsoft.com/office/drawing/2014/main" id="{B8DDA0FF-C482-4D67-BDB0-E5FC8EE15713}"/>
+          <p:cNvPr id="5" name="図 4">
+            <a:extLst>
+              <a:ext uri="{FF2B5EF4-FFF2-40B4-BE49-F238E27FC236}">
+                <a16:creationId xmlns:a16="http://schemas.microsoft.com/office/drawing/2014/main" id="{A1B5BFB4-88C6-41EB-A4E2-5814C04BEF34}"/>
               </a:ext>
             </a:extLst>
           </p:cNvPr>
@@ -5366,7 +4990,7 @@
           <p:nvPr/>
         </p:nvPicPr>
         <p:blipFill>
-          <a:blip r:embed="rId3">
+          <a:blip r:embed="rId2">
             <a:extLst>
               <a:ext uri="{28A0092B-C50C-407E-A947-70E740481C1C}">
                 <a14:useLocalDpi xmlns:a14="http://schemas.microsoft.com/office/drawing/2010/main" val="0"/>
@@ -5379,8 +5003,8 @@
         </p:blipFill>
         <p:spPr>
           <a:xfrm>
-            <a:off x="7172425" y="5627594"/>
-            <a:ext cx="1591082" cy="1591082"/>
+            <a:off x="-643826" y="-322730"/>
+            <a:ext cx="3702839" cy="2958353"/>
           </a:xfrm>
           <a:prstGeom prst="rect">
             <a:avLst/>
@@ -5389,64 +5013,162 @@
       </p:pic>
       <p:sp>
         <p:nvSpPr>
-          <p:cNvPr id="12" name="正方形/長方形 11">
-            <a:extLst>
-              <a:ext uri="{FF2B5EF4-FFF2-40B4-BE49-F238E27FC236}">
-                <a16:creationId xmlns:a16="http://schemas.microsoft.com/office/drawing/2014/main" id="{423660DD-64D5-4D28-8E0F-099C1BF3171F}"/>
-              </a:ext>
-            </a:extLst>
-          </p:cNvPr>
-          <p:cNvSpPr/>
+          <p:cNvPr id="6" name="テキスト ボックス 5">
+            <a:extLst>
+              <a:ext uri="{FF2B5EF4-FFF2-40B4-BE49-F238E27FC236}">
+                <a16:creationId xmlns:a16="http://schemas.microsoft.com/office/drawing/2014/main" id="{B8FF6B8C-025E-4417-9D9E-CE6C8307B779}"/>
+              </a:ext>
+            </a:extLst>
+          </p:cNvPr>
+          <p:cNvSpPr txBox="1"/>
           <p:nvPr/>
         </p:nvSpPr>
         <p:spPr>
           <a:xfrm>
-            <a:off x="10622338" y="5169789"/>
-            <a:ext cx="1569661" cy="166882"/>
+            <a:off x="3059013" y="1156446"/>
+            <a:ext cx="5342965" cy="769441"/>
           </a:xfrm>
           <a:prstGeom prst="rect">
             <a:avLst/>
           </a:prstGeom>
-          <a:solidFill>
-            <a:schemeClr val="tx1"/>
-          </a:solidFill>
-          <a:ln>
-            <a:solidFill>
-              <a:schemeClr val="tx1"/>
-            </a:solidFill>
-          </a:ln>
-        </p:spPr>
-        <p:style>
-          <a:lnRef idx="2">
-            <a:schemeClr val="accent1">
-              <a:shade val="50000"/>
-            </a:schemeClr>
-          </a:lnRef>
-          <a:fillRef idx="1">
-            <a:schemeClr val="accent1"/>
-          </a:fillRef>
-          <a:effectRef idx="0">
-            <a:schemeClr val="accent1"/>
-          </a:effectRef>
-          <a:fontRef idx="minor">
-            <a:schemeClr val="lt1"/>
-          </a:fontRef>
-        </p:style>
-        <p:txBody>
-          <a:bodyPr rtlCol="0" anchor="ctr"/>
-          <a:lstStyle/>
-          <a:p>
-            <a:pPr algn="ctr"/>
-            <a:endParaRPr kumimoji="1" lang="ja-JP" altLang="en-US"/>
-          </a:p>
-        </p:txBody>
-      </p:sp>
+          <a:noFill/>
+        </p:spPr>
+        <p:txBody>
+          <a:bodyPr wrap="square" rtlCol="0">
+            <a:spAutoFit/>
+          </a:bodyPr>
+          <a:lstStyle/>
+          <a:p>
+            <a:r>
+              <a:rPr kumimoji="1" lang="ja-JP" altLang="en-US" sz="4400" dirty="0"/>
+              <a:t>スナイパー</a:t>
+            </a:r>
+          </a:p>
+        </p:txBody>
+      </p:sp>
+      <p:sp>
+        <p:nvSpPr>
+          <p:cNvPr id="7" name="テキスト ボックス 6">
+            <a:extLst>
+              <a:ext uri="{FF2B5EF4-FFF2-40B4-BE49-F238E27FC236}">
+                <a16:creationId xmlns:a16="http://schemas.microsoft.com/office/drawing/2014/main" id="{89C3A1DC-A26A-46CC-BD24-F5130847E9FA}"/>
+              </a:ext>
+            </a:extLst>
+          </p:cNvPr>
+          <p:cNvSpPr txBox="1"/>
+          <p:nvPr/>
+        </p:nvSpPr>
+        <p:spPr>
+          <a:xfrm>
+            <a:off x="89338" y="2635623"/>
+            <a:ext cx="2236510" cy="707886"/>
+          </a:xfrm>
+          <a:prstGeom prst="rect">
+            <a:avLst/>
+          </a:prstGeom>
+          <a:noFill/>
+        </p:spPr>
+        <p:txBody>
+          <a:bodyPr wrap="none" rtlCol="0">
+            <a:spAutoFit/>
+          </a:bodyPr>
+          <a:lstStyle/>
+          <a:p>
+            <a:r>
+              <a:rPr kumimoji="1" lang="ja-JP" altLang="en-US" sz="4000" dirty="0"/>
+              <a:t>ー仕様</a:t>
+            </a:r>
+            <a:r>
+              <a:rPr lang="ja-JP" altLang="en-US" sz="4000" dirty="0"/>
+              <a:t>ー</a:t>
+            </a:r>
+            <a:endParaRPr kumimoji="1" lang="ja-JP" altLang="en-US" sz="4000" dirty="0"/>
+          </a:p>
+        </p:txBody>
+      </p:sp>
+      <p:sp>
+        <p:nvSpPr>
+          <p:cNvPr id="8" name="テキスト ボックス 7">
+            <a:extLst>
+              <a:ext uri="{FF2B5EF4-FFF2-40B4-BE49-F238E27FC236}">
+                <a16:creationId xmlns:a16="http://schemas.microsoft.com/office/drawing/2014/main" id="{C51E1641-90A0-4F62-B95B-CEEF7F25A9CD}"/>
+              </a:ext>
+            </a:extLst>
+          </p:cNvPr>
+          <p:cNvSpPr txBox="1"/>
+          <p:nvPr/>
+        </p:nvSpPr>
+        <p:spPr>
+          <a:xfrm>
+            <a:off x="89338" y="3343509"/>
+            <a:ext cx="6391493" cy="646331"/>
+          </a:xfrm>
+          <a:prstGeom prst="rect">
+            <a:avLst/>
+          </a:prstGeom>
+          <a:noFill/>
+        </p:spPr>
+        <p:txBody>
+          <a:bodyPr wrap="none" rtlCol="0">
+            <a:spAutoFit/>
+          </a:bodyPr>
+          <a:lstStyle/>
+          <a:p>
+            <a:r>
+              <a:rPr kumimoji="1" lang="en-US" altLang="ja-JP" dirty="0"/>
+              <a:t>Player</a:t>
+            </a:r>
+            <a:r>
+              <a:rPr kumimoji="1" lang="ja-JP" altLang="en-US" dirty="0"/>
+              <a:t>がマップを進んでいるところに遠くから狙い撃ちする</a:t>
+            </a:r>
+            <a:endParaRPr kumimoji="1" lang="en-US" altLang="ja-JP" dirty="0"/>
+          </a:p>
+          <a:p>
+            <a:r>
+              <a:rPr lang="ja-JP" altLang="en-US" dirty="0"/>
+              <a:t>一般敵と同じく追尾する</a:t>
+            </a:r>
+            <a:endParaRPr lang="en-US" altLang="ja-JP" dirty="0"/>
+          </a:p>
+        </p:txBody>
+      </p:sp>
+    </p:spTree>
+    <p:extLst>
+      <p:ext uri="{BB962C8B-B14F-4D97-AF65-F5344CB8AC3E}">
+        <p14:creationId xmlns:p14="http://schemas.microsoft.com/office/powerpoint/2010/main" val="3053821899"/>
+      </p:ext>
+    </p:extLst>
+  </p:cSld>
+  <p:clrMapOvr>
+    <a:masterClrMapping/>
+  </p:clrMapOvr>
+</p:sld>
+</file>
+
+<file path=ppt/slides/slide5.xml><?xml version="1.0" encoding="utf-8"?>
+<p:sld xmlns:a="http://schemas.openxmlformats.org/drawingml/2006/main" xmlns:r="http://schemas.openxmlformats.org/officeDocument/2006/relationships" xmlns:p="http://schemas.openxmlformats.org/presentationml/2006/main">
+  <p:cSld>
+    <p:spTree>
+      <p:nvGrpSpPr>
+        <p:cNvPr id="1" name=""/>
+        <p:cNvGrpSpPr/>
+        <p:nvPr/>
+      </p:nvGrpSpPr>
+      <p:grpSpPr>
+        <a:xfrm>
+          <a:off x="0" y="0"/>
+          <a:ext cx="0" cy="0"/>
+          <a:chOff x="0" y="0"/>
+          <a:chExt cx="0" cy="0"/>
+        </a:xfrm>
+      </p:grpSpPr>
       <p:pic>
         <p:nvPicPr>
-          <p:cNvPr id="16" name="図 15">
-            <a:extLst>
-              <a:ext uri="{FF2B5EF4-FFF2-40B4-BE49-F238E27FC236}">
-                <a16:creationId xmlns:a16="http://schemas.microsoft.com/office/drawing/2014/main" id="{BD6A6CB5-F353-4B00-87A7-7FCEAB95563C}"/>
+          <p:cNvPr id="5" name="図 4">
+            <a:extLst>
+              <a:ext uri="{FF2B5EF4-FFF2-40B4-BE49-F238E27FC236}">
+                <a16:creationId xmlns:a16="http://schemas.microsoft.com/office/drawing/2014/main" id="{58B7B775-AB1F-49DA-AC29-07E3BC5084F4}"/>
               </a:ext>
             </a:extLst>
           </p:cNvPr>
@@ -5456,7 +5178,7 @@
           <p:nvPr/>
         </p:nvPicPr>
         <p:blipFill>
-          <a:blip r:embed="rId4">
+          <a:blip r:embed="rId2">
             <a:extLst>
               <a:ext uri="{28A0092B-C50C-407E-A947-70E740481C1C}">
                 <a14:useLocalDpi xmlns:a14="http://schemas.microsoft.com/office/drawing/2010/main" val="0"/>
@@ -5469,50 +5191,152 @@
         </p:blipFill>
         <p:spPr>
           <a:xfrm>
-            <a:off x="10918480" y="4165850"/>
-            <a:ext cx="1184182" cy="1078451"/>
+            <a:off x="-170168" y="56763"/>
+            <a:ext cx="3229181" cy="2578860"/>
           </a:xfrm>
           <a:prstGeom prst="rect">
             <a:avLst/>
           </a:prstGeom>
         </p:spPr>
       </p:pic>
-      <p:pic>
-        <p:nvPicPr>
-          <p:cNvPr id="18" name="図 17">
-            <a:extLst>
-              <a:ext uri="{FF2B5EF4-FFF2-40B4-BE49-F238E27FC236}">
-                <a16:creationId xmlns:a16="http://schemas.microsoft.com/office/drawing/2014/main" id="{1650F88F-ADB4-4AED-8D44-AE23C25891F8}"/>
-              </a:ext>
-            </a:extLst>
-          </p:cNvPr>
-          <p:cNvPicPr>
-            <a:picLocks noChangeAspect="1"/>
-          </p:cNvPicPr>
+      <p:sp>
+        <p:nvSpPr>
+          <p:cNvPr id="6" name="テキスト ボックス 5">
+            <a:extLst>
+              <a:ext uri="{FF2B5EF4-FFF2-40B4-BE49-F238E27FC236}">
+                <a16:creationId xmlns:a16="http://schemas.microsoft.com/office/drawing/2014/main" id="{AB4FE6D2-2F23-41F4-9356-02654CF8C90B}"/>
+              </a:ext>
+            </a:extLst>
+          </p:cNvPr>
+          <p:cNvSpPr txBox="1"/>
           <p:nvPr/>
-        </p:nvPicPr>
-        <p:blipFill>
-          <a:blip r:embed="rId5">
-            <a:extLst>
-              <a:ext uri="{28A0092B-C50C-407E-A947-70E740481C1C}">
-                <a14:useLocalDpi xmlns:a14="http://schemas.microsoft.com/office/drawing/2010/main" val="0"/>
-              </a:ext>
-            </a:extLst>
-          </a:blip>
-          <a:stretch>
-            <a:fillRect/>
-          </a:stretch>
-        </p:blipFill>
-        <p:spPr>
-          <a:xfrm rot="19443982">
-            <a:off x="8776093" y="5135320"/>
-            <a:ext cx="1414238" cy="501503"/>
+        </p:nvSpPr>
+        <p:spPr>
+          <a:xfrm>
+            <a:off x="3059013" y="1156446"/>
+            <a:ext cx="7385150" cy="769441"/>
           </a:xfrm>
           <a:prstGeom prst="rect">
             <a:avLst/>
           </a:prstGeom>
-        </p:spPr>
-      </p:pic>
+          <a:noFill/>
+        </p:spPr>
+        <p:txBody>
+          <a:bodyPr wrap="square" rtlCol="0">
+            <a:spAutoFit/>
+          </a:bodyPr>
+          <a:lstStyle/>
+          <a:p>
+            <a:r>
+              <a:rPr kumimoji="1" lang="ja-JP" altLang="en-US" sz="4400" dirty="0"/>
+              <a:t>ロケットランチャー</a:t>
+            </a:r>
+          </a:p>
+        </p:txBody>
+      </p:sp>
+      <p:sp>
+        <p:nvSpPr>
+          <p:cNvPr id="7" name="テキスト ボックス 6">
+            <a:extLst>
+              <a:ext uri="{FF2B5EF4-FFF2-40B4-BE49-F238E27FC236}">
+                <a16:creationId xmlns:a16="http://schemas.microsoft.com/office/drawing/2014/main" id="{4C0B6E83-C98A-45C3-8623-BC1183F914C9}"/>
+              </a:ext>
+            </a:extLst>
+          </p:cNvPr>
+          <p:cNvSpPr txBox="1"/>
+          <p:nvPr/>
+        </p:nvSpPr>
+        <p:spPr>
+          <a:xfrm>
+            <a:off x="89338" y="2635623"/>
+            <a:ext cx="2236510" cy="707886"/>
+          </a:xfrm>
+          <a:prstGeom prst="rect">
+            <a:avLst/>
+          </a:prstGeom>
+          <a:noFill/>
+        </p:spPr>
+        <p:txBody>
+          <a:bodyPr wrap="none" rtlCol="0">
+            <a:spAutoFit/>
+          </a:bodyPr>
+          <a:lstStyle/>
+          <a:p>
+            <a:r>
+              <a:rPr kumimoji="1" lang="ja-JP" altLang="en-US" sz="4000" dirty="0"/>
+              <a:t>ー仕様</a:t>
+            </a:r>
+            <a:r>
+              <a:rPr lang="ja-JP" altLang="en-US" sz="4000" dirty="0"/>
+              <a:t>ー</a:t>
+            </a:r>
+            <a:endParaRPr kumimoji="1" lang="ja-JP" altLang="en-US" sz="4000" dirty="0"/>
+          </a:p>
+        </p:txBody>
+      </p:sp>
+      <p:sp>
+        <p:nvSpPr>
+          <p:cNvPr id="8" name="テキスト ボックス 7">
+            <a:extLst>
+              <a:ext uri="{FF2B5EF4-FFF2-40B4-BE49-F238E27FC236}">
+                <a16:creationId xmlns:a16="http://schemas.microsoft.com/office/drawing/2014/main" id="{F34CE85E-344E-4D74-932F-36535B4971F0}"/>
+              </a:ext>
+            </a:extLst>
+          </p:cNvPr>
+          <p:cNvSpPr txBox="1"/>
+          <p:nvPr/>
+        </p:nvSpPr>
+        <p:spPr>
+          <a:xfrm>
+            <a:off x="89338" y="3343509"/>
+            <a:ext cx="8674169" cy="646331"/>
+          </a:xfrm>
+          <a:prstGeom prst="rect">
+            <a:avLst/>
+          </a:prstGeom>
+          <a:noFill/>
+        </p:spPr>
+        <p:txBody>
+          <a:bodyPr wrap="none" rtlCol="0">
+            <a:spAutoFit/>
+          </a:bodyPr>
+          <a:lstStyle/>
+          <a:p>
+            <a:r>
+              <a:rPr kumimoji="1" lang="en-US" altLang="ja-JP" dirty="0"/>
+              <a:t>Player</a:t>
+            </a:r>
+            <a:r>
+              <a:rPr kumimoji="1" lang="ja-JP" altLang="en-US" dirty="0"/>
+              <a:t>がマップを進んでいるときに</a:t>
+            </a:r>
+            <a:r>
+              <a:rPr kumimoji="1" lang="en-US" altLang="ja-JP" dirty="0"/>
+              <a:t>Player</a:t>
+            </a:r>
+            <a:r>
+              <a:rPr kumimoji="1" lang="ja-JP" altLang="en-US" dirty="0"/>
+              <a:t>の届かない場所から追尾弾を打ってくる</a:t>
+            </a:r>
+            <a:endParaRPr kumimoji="1" lang="en-US" altLang="ja-JP" dirty="0"/>
+          </a:p>
+          <a:p>
+            <a:r>
+              <a:rPr kumimoji="1" lang="ja-JP" altLang="en-US" dirty="0"/>
+              <a:t>一度打つと壁に当たるか</a:t>
+            </a:r>
+            <a:r>
+              <a:rPr kumimoji="1" lang="en-US" altLang="ja-JP" dirty="0"/>
+              <a:t>Player</a:t>
+            </a:r>
+            <a:r>
+              <a:rPr kumimoji="1" lang="ja-JP" altLang="en-US" dirty="0"/>
+              <a:t>に当たるまで二発目は打たない</a:t>
+            </a:r>
+            <a:endParaRPr kumimoji="1" lang="en-US" altLang="ja-JP" dirty="0"/>
+          </a:p>
+        </p:txBody>
+      </p:sp>
     </p:spTree>
     <p:extLst>
       <p:ext uri="{BB962C8B-B14F-4D97-AF65-F5344CB8AC3E}">
@@ -5526,7 +5350,7 @@
 </p:sld>
 </file>
 
-<file path=ppt/slides/slide4.xml><?xml version="1.0" encoding="utf-8"?>
+<file path=ppt/slides/slide6.xml><?xml version="1.0" encoding="utf-8"?>
 <p:sld xmlns:a="http://schemas.openxmlformats.org/drawingml/2006/main" xmlns:r="http://schemas.openxmlformats.org/officeDocument/2006/relationships" xmlns:p="http://schemas.openxmlformats.org/presentationml/2006/main">
   <p:cSld>
     <p:spTree>
